--- a/media/module4/slides.pptx
+++ b/media/module4/slides.pptx
@@ -73,6 +73,22 @@
     <p:sldId id="321" r:id="rId73"/>
     <p:sldId id="322" r:id="rId74"/>
     <p:sldId id="323" r:id="rId75"/>
+    <p:sldId id="324" r:id="rId76"/>
+    <p:sldId id="325" r:id="rId77"/>
+    <p:sldId id="326" r:id="rId78"/>
+    <p:sldId id="327" r:id="rId79"/>
+    <p:sldId id="328" r:id="rId80"/>
+    <p:sldId id="329" r:id="rId81"/>
+    <p:sldId id="330" r:id="rId82"/>
+    <p:sldId id="331" r:id="rId83"/>
+    <p:sldId id="332" r:id="rId84"/>
+    <p:sldId id="333" r:id="rId85"/>
+    <p:sldId id="334" r:id="rId86"/>
+    <p:sldId id="335" r:id="rId87"/>
+    <p:sldId id="336" r:id="rId88"/>
+    <p:sldId id="337" r:id="rId89"/>
+    <p:sldId id="338" r:id="rId90"/>
+    <p:sldId id="339" r:id="rId91"/>
   </p:sldIdLst>
   <p:sldSz cx="12191695" cy="6858000" type="screen4x3"/>
   <p:notesSz cx="6858000" cy="9144000"/>
@@ -4094,6 +4110,286 @@
 </p:notes>
 </file>
 
+<file path=ppt/notesSlides/notesSlide56.xml><?xml version="1.0" encoding="utf-8"?>
+<p:notes xmlns:a="http://schemas.openxmlformats.org/drawingml/2006/main" xmlns:p="http://schemas.openxmlformats.org/presentationml/2006/main" xmlns:r="http://schemas.openxmlformats.org/officeDocument/2006/relationships">
+  <p:cSld>
+    <p:spTree>
+      <p:nvGrpSpPr>
+        <p:cNvPr id="1" name=""/>
+        <p:cNvGrpSpPr/>
+        <p:nvPr/>
+      </p:nvGrpSpPr>
+      <p:grpSpPr>
+        <a:xfrm>
+          <a:off x="0" y="0"/>
+          <a:ext cx="0" cy="0"/>
+          <a:chOff x="0" y="0"/>
+          <a:chExt cx="0" cy="0"/>
+        </a:xfrm>
+      </p:grpSpPr>
+      <p:sp>
+        <p:nvSpPr>
+          <p:cNvPr id="2" name="Slide Image Placeholder 1"/>
+          <p:cNvSpPr>
+            <a:spLocks noGrp="1"/>
+          </p:cNvSpPr>
+          <p:nvPr>
+            <p:ph type="sldImg" idx="2"/>
+          </p:nvPr>
+        </p:nvSpPr>
+        <p:spPr/>
+      </p:sp>
+      <p:sp>
+        <p:nvSpPr>
+          <p:cNvPr id="3" name="Notes Placeholder 2"/>
+          <p:cNvSpPr>
+            <a:spLocks noGrp="1"/>
+          </p:cNvSpPr>
+          <p:nvPr>
+            <p:ph type="body" idx="3" sz="quarter"/>
+          </p:nvPr>
+        </p:nvSpPr>
+        <p:spPr/>
+        <p:txBody>
+          <a:bodyPr/>
+          <a:lstStyle/>
+          <a:p>
+            <a:r>
+              <a:t>module4/examples/transactions/README.md</a:t>
+            </a:r>
+          </a:p>
+        </p:txBody>
+      </p:sp>
+      <p:sp>
+        <p:nvSpPr>
+          <p:cNvPr id="4" name="Slide Number Placeholder 3"/>
+          <p:cNvSpPr>
+            <a:spLocks noGrp="1"/>
+          </p:cNvSpPr>
+          <p:nvPr>
+            <p:ph type="sldNum" idx="5" sz="quarter"/>
+          </p:nvPr>
+        </p:nvSpPr>
+        <p:spPr/>
+      </p:sp>
+    </p:spTree>
+  </p:cSld>
+  <p:clrMapOvr>
+    <a:masterClrMapping/>
+  </p:clrMapOvr>
+</p:notes>
+</file>
+
+<file path=ppt/notesSlides/notesSlide57.xml><?xml version="1.0" encoding="utf-8"?>
+<p:notes xmlns:a="http://schemas.openxmlformats.org/drawingml/2006/main" xmlns:p="http://schemas.openxmlformats.org/presentationml/2006/main" xmlns:r="http://schemas.openxmlformats.org/officeDocument/2006/relationships">
+  <p:cSld>
+    <p:spTree>
+      <p:nvGrpSpPr>
+        <p:cNvPr id="1" name=""/>
+        <p:cNvGrpSpPr/>
+        <p:nvPr/>
+      </p:nvGrpSpPr>
+      <p:grpSpPr>
+        <a:xfrm>
+          <a:off x="0" y="0"/>
+          <a:ext cx="0" cy="0"/>
+          <a:chOff x="0" y="0"/>
+          <a:chExt cx="0" cy="0"/>
+        </a:xfrm>
+      </p:grpSpPr>
+      <p:sp>
+        <p:nvSpPr>
+          <p:cNvPr id="2" name="Slide Image Placeholder 1"/>
+          <p:cNvSpPr>
+            <a:spLocks noGrp="1"/>
+          </p:cNvSpPr>
+          <p:nvPr>
+            <p:ph type="sldImg" idx="2"/>
+          </p:nvPr>
+        </p:nvSpPr>
+        <p:spPr/>
+      </p:sp>
+      <p:sp>
+        <p:nvSpPr>
+          <p:cNvPr id="3" name="Notes Placeholder 2"/>
+          <p:cNvSpPr>
+            <a:spLocks noGrp="1"/>
+          </p:cNvSpPr>
+          <p:nvPr>
+            <p:ph type="body" idx="3" sz="quarter"/>
+          </p:nvPr>
+        </p:nvSpPr>
+        <p:spPr/>
+        <p:txBody>
+          <a:bodyPr/>
+          <a:lstStyle/>
+          <a:p>
+            <a:r>
+              <a:t>Hands-on: module4/examples/transactions/</a:t>
+            </a:r>
+          </a:p>
+        </p:txBody>
+      </p:sp>
+      <p:sp>
+        <p:nvSpPr>
+          <p:cNvPr id="4" name="Slide Number Placeholder 3"/>
+          <p:cNvSpPr>
+            <a:spLocks noGrp="1"/>
+          </p:cNvSpPr>
+          <p:nvPr>
+            <p:ph type="sldNum" idx="5" sz="quarter"/>
+          </p:nvPr>
+        </p:nvSpPr>
+        <p:spPr/>
+      </p:sp>
+    </p:spTree>
+  </p:cSld>
+  <p:clrMapOvr>
+    <a:masterClrMapping/>
+  </p:clrMapOvr>
+</p:notes>
+</file>
+
+<file path=ppt/notesSlides/notesSlide58.xml><?xml version="1.0" encoding="utf-8"?>
+<p:notes xmlns:a="http://schemas.openxmlformats.org/drawingml/2006/main" xmlns:p="http://schemas.openxmlformats.org/presentationml/2006/main" xmlns:r="http://schemas.openxmlformats.org/officeDocument/2006/relationships">
+  <p:cSld>
+    <p:spTree>
+      <p:nvGrpSpPr>
+        <p:cNvPr id="1" name=""/>
+        <p:cNvGrpSpPr/>
+        <p:nvPr/>
+      </p:nvGrpSpPr>
+      <p:grpSpPr>
+        <a:xfrm>
+          <a:off x="0" y="0"/>
+          <a:ext cx="0" cy="0"/>
+          <a:chOff x="0" y="0"/>
+          <a:chExt cx="0" cy="0"/>
+        </a:xfrm>
+      </p:grpSpPr>
+      <p:sp>
+        <p:nvSpPr>
+          <p:cNvPr id="2" name="Slide Image Placeholder 1"/>
+          <p:cNvSpPr>
+            <a:spLocks noGrp="1"/>
+          </p:cNvSpPr>
+          <p:nvPr>
+            <p:ph type="sldImg" idx="2"/>
+          </p:nvPr>
+        </p:nvSpPr>
+        <p:spPr/>
+      </p:sp>
+      <p:sp>
+        <p:nvSpPr>
+          <p:cNvPr id="3" name="Notes Placeholder 2"/>
+          <p:cNvSpPr>
+            <a:spLocks noGrp="1"/>
+          </p:cNvSpPr>
+          <p:nvPr>
+            <p:ph type="body" idx="3" sz="quarter"/>
+          </p:nvPr>
+        </p:nvSpPr>
+        <p:spPr/>
+        <p:txBody>
+          <a:bodyPr/>
+          <a:lstStyle/>
+          <a:p>
+            <a:r>
+              <a:t>module4/examples/drivers/README.md</a:t>
+            </a:r>
+          </a:p>
+        </p:txBody>
+      </p:sp>
+      <p:sp>
+        <p:nvSpPr>
+          <p:cNvPr id="4" name="Slide Number Placeholder 3"/>
+          <p:cNvSpPr>
+            <a:spLocks noGrp="1"/>
+          </p:cNvSpPr>
+          <p:nvPr>
+            <p:ph type="sldNum" idx="5" sz="quarter"/>
+          </p:nvPr>
+        </p:nvSpPr>
+        <p:spPr/>
+      </p:sp>
+    </p:spTree>
+  </p:cSld>
+  <p:clrMapOvr>
+    <a:masterClrMapping/>
+  </p:clrMapOvr>
+</p:notes>
+</file>
+
+<file path=ppt/notesSlides/notesSlide59.xml><?xml version="1.0" encoding="utf-8"?>
+<p:notes xmlns:a="http://schemas.openxmlformats.org/drawingml/2006/main" xmlns:p="http://schemas.openxmlformats.org/presentationml/2006/main" xmlns:r="http://schemas.openxmlformats.org/officeDocument/2006/relationships">
+  <p:cSld>
+    <p:spTree>
+      <p:nvGrpSpPr>
+        <p:cNvPr id="1" name=""/>
+        <p:cNvGrpSpPr/>
+        <p:nvPr/>
+      </p:nvGrpSpPr>
+      <p:grpSpPr>
+        <a:xfrm>
+          <a:off x="0" y="0"/>
+          <a:ext cx="0" cy="0"/>
+          <a:chOff x="0" y="0"/>
+          <a:chExt cx="0" cy="0"/>
+        </a:xfrm>
+      </p:grpSpPr>
+      <p:sp>
+        <p:nvSpPr>
+          <p:cNvPr id="2" name="Slide Image Placeholder 1"/>
+          <p:cNvSpPr>
+            <a:spLocks noGrp="1"/>
+          </p:cNvSpPr>
+          <p:nvPr>
+            <p:ph type="sldImg" idx="2"/>
+          </p:nvPr>
+        </p:nvSpPr>
+        <p:spPr/>
+      </p:sp>
+      <p:sp>
+        <p:nvSpPr>
+          <p:cNvPr id="3" name="Notes Placeholder 2"/>
+          <p:cNvSpPr>
+            <a:spLocks noGrp="1"/>
+          </p:cNvSpPr>
+          <p:nvPr>
+            <p:ph type="body" idx="3" sz="quarter"/>
+          </p:nvPr>
+        </p:nvSpPr>
+        <p:spPr/>
+        <p:txBody>
+          <a:bodyPr/>
+          <a:lstStyle/>
+          <a:p>
+            <a:r>
+              <a:t>Hands-on: module4/examples/drivers/</a:t>
+            </a:r>
+          </a:p>
+        </p:txBody>
+      </p:sp>
+      <p:sp>
+        <p:nvSpPr>
+          <p:cNvPr id="4" name="Slide Number Placeholder 3"/>
+          <p:cNvSpPr>
+            <a:spLocks noGrp="1"/>
+          </p:cNvSpPr>
+          <p:nvPr>
+            <p:ph type="sldNum" idx="5" sz="quarter"/>
+          </p:nvPr>
+        </p:nvSpPr>
+        <p:spPr/>
+      </p:sp>
+    </p:spTree>
+  </p:cSld>
+  <p:clrMapOvr>
+    <a:masterClrMapping/>
+  </p:clrMapOvr>
+</p:notes>
+</file>
+
 <file path=ppt/notesSlides/notesSlide6.xml><?xml version="1.0" encoding="utf-8"?>
 <p:notes xmlns:a="http://schemas.openxmlformats.org/drawingml/2006/main" xmlns:p="http://schemas.openxmlformats.org/presentationml/2006/main" xmlns:r="http://schemas.openxmlformats.org/officeDocument/2006/relationships">
   <p:cSld>
@@ -4140,6 +4436,706 @@
           <a:p>
             <a:r>
               <a:t>From MODULE4 Topics Covered.</a:t>
+            </a:r>
+          </a:p>
+        </p:txBody>
+      </p:sp>
+      <p:sp>
+        <p:nvSpPr>
+          <p:cNvPr id="4" name="Slide Number Placeholder 3"/>
+          <p:cNvSpPr>
+            <a:spLocks noGrp="1"/>
+          </p:cNvSpPr>
+          <p:nvPr>
+            <p:ph type="sldNum" idx="5" sz="quarter"/>
+          </p:nvPr>
+        </p:nvSpPr>
+        <p:spPr/>
+      </p:sp>
+    </p:spTree>
+  </p:cSld>
+  <p:clrMapOvr>
+    <a:masterClrMapping/>
+  </p:clrMapOvr>
+</p:notes>
+</file>
+
+<file path=ppt/notesSlides/notesSlide60.xml><?xml version="1.0" encoding="utf-8"?>
+<p:notes xmlns:a="http://schemas.openxmlformats.org/drawingml/2006/main" xmlns:p="http://schemas.openxmlformats.org/presentationml/2006/main" xmlns:r="http://schemas.openxmlformats.org/officeDocument/2006/relationships">
+  <p:cSld>
+    <p:spTree>
+      <p:nvGrpSpPr>
+        <p:cNvPr id="1" name=""/>
+        <p:cNvGrpSpPr/>
+        <p:nvPr/>
+      </p:nvGrpSpPr>
+      <p:grpSpPr>
+        <a:xfrm>
+          <a:off x="0" y="0"/>
+          <a:ext cx="0" cy="0"/>
+          <a:chOff x="0" y="0"/>
+          <a:chExt cx="0" cy="0"/>
+        </a:xfrm>
+      </p:grpSpPr>
+      <p:sp>
+        <p:nvSpPr>
+          <p:cNvPr id="2" name="Slide Image Placeholder 1"/>
+          <p:cNvSpPr>
+            <a:spLocks noGrp="1"/>
+          </p:cNvSpPr>
+          <p:nvPr>
+            <p:ph type="sldImg" idx="2"/>
+          </p:nvPr>
+        </p:nvSpPr>
+        <p:spPr/>
+      </p:sp>
+      <p:sp>
+        <p:nvSpPr>
+          <p:cNvPr id="3" name="Notes Placeholder 2"/>
+          <p:cNvSpPr>
+            <a:spLocks noGrp="1"/>
+          </p:cNvSpPr>
+          <p:nvPr>
+            <p:ph type="body" idx="3" sz="quarter"/>
+          </p:nvPr>
+        </p:nvSpPr>
+        <p:spPr/>
+        <p:txBody>
+          <a:bodyPr/>
+          <a:lstStyle/>
+          <a:p>
+            <a:r>
+              <a:t>module4/examples/monitors/README.md</a:t>
+            </a:r>
+          </a:p>
+        </p:txBody>
+      </p:sp>
+      <p:sp>
+        <p:nvSpPr>
+          <p:cNvPr id="4" name="Slide Number Placeholder 3"/>
+          <p:cNvSpPr>
+            <a:spLocks noGrp="1"/>
+          </p:cNvSpPr>
+          <p:nvPr>
+            <p:ph type="sldNum" idx="5" sz="quarter"/>
+          </p:nvPr>
+        </p:nvSpPr>
+        <p:spPr/>
+      </p:sp>
+    </p:spTree>
+  </p:cSld>
+  <p:clrMapOvr>
+    <a:masterClrMapping/>
+  </p:clrMapOvr>
+</p:notes>
+</file>
+
+<file path=ppt/notesSlides/notesSlide61.xml><?xml version="1.0" encoding="utf-8"?>
+<p:notes xmlns:a="http://schemas.openxmlformats.org/drawingml/2006/main" xmlns:p="http://schemas.openxmlformats.org/presentationml/2006/main" xmlns:r="http://schemas.openxmlformats.org/officeDocument/2006/relationships">
+  <p:cSld>
+    <p:spTree>
+      <p:nvGrpSpPr>
+        <p:cNvPr id="1" name=""/>
+        <p:cNvGrpSpPr/>
+        <p:nvPr/>
+      </p:nvGrpSpPr>
+      <p:grpSpPr>
+        <a:xfrm>
+          <a:off x="0" y="0"/>
+          <a:ext cx="0" cy="0"/>
+          <a:chOff x="0" y="0"/>
+          <a:chExt cx="0" cy="0"/>
+        </a:xfrm>
+      </p:grpSpPr>
+      <p:sp>
+        <p:nvSpPr>
+          <p:cNvPr id="2" name="Slide Image Placeholder 1"/>
+          <p:cNvSpPr>
+            <a:spLocks noGrp="1"/>
+          </p:cNvSpPr>
+          <p:nvPr>
+            <p:ph type="sldImg" idx="2"/>
+          </p:nvPr>
+        </p:nvSpPr>
+        <p:spPr/>
+      </p:sp>
+      <p:sp>
+        <p:nvSpPr>
+          <p:cNvPr id="3" name="Notes Placeholder 2"/>
+          <p:cNvSpPr>
+            <a:spLocks noGrp="1"/>
+          </p:cNvSpPr>
+          <p:nvPr>
+            <p:ph type="body" idx="3" sz="quarter"/>
+          </p:nvPr>
+        </p:nvSpPr>
+        <p:spPr/>
+        <p:txBody>
+          <a:bodyPr/>
+          <a:lstStyle/>
+          <a:p>
+            <a:r>
+              <a:t>Hands-on: module4/examples/monitors/</a:t>
+            </a:r>
+          </a:p>
+        </p:txBody>
+      </p:sp>
+      <p:sp>
+        <p:nvSpPr>
+          <p:cNvPr id="4" name="Slide Number Placeholder 3"/>
+          <p:cNvSpPr>
+            <a:spLocks noGrp="1"/>
+          </p:cNvSpPr>
+          <p:nvPr>
+            <p:ph type="sldNum" idx="5" sz="quarter"/>
+          </p:nvPr>
+        </p:nvSpPr>
+        <p:spPr/>
+      </p:sp>
+    </p:spTree>
+  </p:cSld>
+  <p:clrMapOvr>
+    <a:masterClrMapping/>
+  </p:clrMapOvr>
+</p:notes>
+</file>
+
+<file path=ppt/notesSlides/notesSlide62.xml><?xml version="1.0" encoding="utf-8"?>
+<p:notes xmlns:a="http://schemas.openxmlformats.org/drawingml/2006/main" xmlns:p="http://schemas.openxmlformats.org/presentationml/2006/main" xmlns:r="http://schemas.openxmlformats.org/officeDocument/2006/relationships">
+  <p:cSld>
+    <p:spTree>
+      <p:nvGrpSpPr>
+        <p:cNvPr id="1" name=""/>
+        <p:cNvGrpSpPr/>
+        <p:nvPr/>
+      </p:nvGrpSpPr>
+      <p:grpSpPr>
+        <a:xfrm>
+          <a:off x="0" y="0"/>
+          <a:ext cx="0" cy="0"/>
+          <a:chOff x="0" y="0"/>
+          <a:chExt cx="0" cy="0"/>
+        </a:xfrm>
+      </p:grpSpPr>
+      <p:sp>
+        <p:nvSpPr>
+          <p:cNvPr id="2" name="Slide Image Placeholder 1"/>
+          <p:cNvSpPr>
+            <a:spLocks noGrp="1"/>
+          </p:cNvSpPr>
+          <p:nvPr>
+            <p:ph type="sldImg" idx="2"/>
+          </p:nvPr>
+        </p:nvSpPr>
+        <p:spPr/>
+      </p:sp>
+      <p:sp>
+        <p:nvSpPr>
+          <p:cNvPr id="3" name="Notes Placeholder 2"/>
+          <p:cNvSpPr>
+            <a:spLocks noGrp="1"/>
+          </p:cNvSpPr>
+          <p:nvPr>
+            <p:ph type="body" idx="3" sz="quarter"/>
+          </p:nvPr>
+        </p:nvSpPr>
+        <p:spPr/>
+        <p:txBody>
+          <a:bodyPr/>
+          <a:lstStyle/>
+          <a:p>
+            <a:r>
+              <a:t>module4/examples/sequencers/README.md</a:t>
+            </a:r>
+          </a:p>
+        </p:txBody>
+      </p:sp>
+      <p:sp>
+        <p:nvSpPr>
+          <p:cNvPr id="4" name="Slide Number Placeholder 3"/>
+          <p:cNvSpPr>
+            <a:spLocks noGrp="1"/>
+          </p:cNvSpPr>
+          <p:nvPr>
+            <p:ph type="sldNum" idx="5" sz="quarter"/>
+          </p:nvPr>
+        </p:nvSpPr>
+        <p:spPr/>
+      </p:sp>
+    </p:spTree>
+  </p:cSld>
+  <p:clrMapOvr>
+    <a:masterClrMapping/>
+  </p:clrMapOvr>
+</p:notes>
+</file>
+
+<file path=ppt/notesSlides/notesSlide63.xml><?xml version="1.0" encoding="utf-8"?>
+<p:notes xmlns:a="http://schemas.openxmlformats.org/drawingml/2006/main" xmlns:p="http://schemas.openxmlformats.org/presentationml/2006/main" xmlns:r="http://schemas.openxmlformats.org/officeDocument/2006/relationships">
+  <p:cSld>
+    <p:spTree>
+      <p:nvGrpSpPr>
+        <p:cNvPr id="1" name=""/>
+        <p:cNvGrpSpPr/>
+        <p:nvPr/>
+      </p:nvGrpSpPr>
+      <p:grpSpPr>
+        <a:xfrm>
+          <a:off x="0" y="0"/>
+          <a:ext cx="0" cy="0"/>
+          <a:chOff x="0" y="0"/>
+          <a:chExt cx="0" cy="0"/>
+        </a:xfrm>
+      </p:grpSpPr>
+      <p:sp>
+        <p:nvSpPr>
+          <p:cNvPr id="2" name="Slide Image Placeholder 1"/>
+          <p:cNvSpPr>
+            <a:spLocks noGrp="1"/>
+          </p:cNvSpPr>
+          <p:nvPr>
+            <p:ph type="sldImg" idx="2"/>
+          </p:nvPr>
+        </p:nvSpPr>
+        <p:spPr/>
+      </p:sp>
+      <p:sp>
+        <p:nvSpPr>
+          <p:cNvPr id="3" name="Notes Placeholder 2"/>
+          <p:cNvSpPr>
+            <a:spLocks noGrp="1"/>
+          </p:cNvSpPr>
+          <p:nvPr>
+            <p:ph type="body" idx="3" sz="quarter"/>
+          </p:nvPr>
+        </p:nvSpPr>
+        <p:spPr/>
+        <p:txBody>
+          <a:bodyPr/>
+          <a:lstStyle/>
+          <a:p>
+            <a:r>
+              <a:t>Hands-on: module4/examples/sequencers/</a:t>
+            </a:r>
+          </a:p>
+        </p:txBody>
+      </p:sp>
+      <p:sp>
+        <p:nvSpPr>
+          <p:cNvPr id="4" name="Slide Number Placeholder 3"/>
+          <p:cNvSpPr>
+            <a:spLocks noGrp="1"/>
+          </p:cNvSpPr>
+          <p:nvPr>
+            <p:ph type="sldNum" idx="5" sz="quarter"/>
+          </p:nvPr>
+        </p:nvSpPr>
+        <p:spPr/>
+      </p:sp>
+    </p:spTree>
+  </p:cSld>
+  <p:clrMapOvr>
+    <a:masterClrMapping/>
+  </p:clrMapOvr>
+</p:notes>
+</file>
+
+<file path=ppt/notesSlides/notesSlide64.xml><?xml version="1.0" encoding="utf-8"?>
+<p:notes xmlns:a="http://schemas.openxmlformats.org/drawingml/2006/main" xmlns:p="http://schemas.openxmlformats.org/presentationml/2006/main" xmlns:r="http://schemas.openxmlformats.org/officeDocument/2006/relationships">
+  <p:cSld>
+    <p:spTree>
+      <p:nvGrpSpPr>
+        <p:cNvPr id="1" name=""/>
+        <p:cNvGrpSpPr/>
+        <p:nvPr/>
+      </p:nvGrpSpPr>
+      <p:grpSpPr>
+        <a:xfrm>
+          <a:off x="0" y="0"/>
+          <a:ext cx="0" cy="0"/>
+          <a:chOff x="0" y="0"/>
+          <a:chExt cx="0" cy="0"/>
+        </a:xfrm>
+      </p:grpSpPr>
+      <p:sp>
+        <p:nvSpPr>
+          <p:cNvPr id="2" name="Slide Image Placeholder 1"/>
+          <p:cNvSpPr>
+            <a:spLocks noGrp="1"/>
+          </p:cNvSpPr>
+          <p:nvPr>
+            <p:ph type="sldImg" idx="2"/>
+          </p:nvPr>
+        </p:nvSpPr>
+        <p:spPr/>
+      </p:sp>
+      <p:sp>
+        <p:nvSpPr>
+          <p:cNvPr id="3" name="Notes Placeholder 2"/>
+          <p:cNvSpPr>
+            <a:spLocks noGrp="1"/>
+          </p:cNvSpPr>
+          <p:nvPr>
+            <p:ph type="body" idx="3" sz="quarter"/>
+          </p:nvPr>
+        </p:nvSpPr>
+        <p:spPr/>
+        <p:txBody>
+          <a:bodyPr/>
+          <a:lstStyle/>
+          <a:p>
+            <a:r>
+              <a:t>module4/examples/tlm/README.md</a:t>
+            </a:r>
+          </a:p>
+        </p:txBody>
+      </p:sp>
+      <p:sp>
+        <p:nvSpPr>
+          <p:cNvPr id="4" name="Slide Number Placeholder 3"/>
+          <p:cNvSpPr>
+            <a:spLocks noGrp="1"/>
+          </p:cNvSpPr>
+          <p:nvPr>
+            <p:ph type="sldNum" idx="5" sz="quarter"/>
+          </p:nvPr>
+        </p:nvSpPr>
+        <p:spPr/>
+      </p:sp>
+    </p:spTree>
+  </p:cSld>
+  <p:clrMapOvr>
+    <a:masterClrMapping/>
+  </p:clrMapOvr>
+</p:notes>
+</file>
+
+<file path=ppt/notesSlides/notesSlide65.xml><?xml version="1.0" encoding="utf-8"?>
+<p:notes xmlns:a="http://schemas.openxmlformats.org/drawingml/2006/main" xmlns:p="http://schemas.openxmlformats.org/presentationml/2006/main" xmlns:r="http://schemas.openxmlformats.org/officeDocument/2006/relationships">
+  <p:cSld>
+    <p:spTree>
+      <p:nvGrpSpPr>
+        <p:cNvPr id="1" name=""/>
+        <p:cNvGrpSpPr/>
+        <p:nvPr/>
+      </p:nvGrpSpPr>
+      <p:grpSpPr>
+        <a:xfrm>
+          <a:off x="0" y="0"/>
+          <a:ext cx="0" cy="0"/>
+          <a:chOff x="0" y="0"/>
+          <a:chExt cx="0" cy="0"/>
+        </a:xfrm>
+      </p:grpSpPr>
+      <p:sp>
+        <p:nvSpPr>
+          <p:cNvPr id="2" name="Slide Image Placeholder 1"/>
+          <p:cNvSpPr>
+            <a:spLocks noGrp="1"/>
+          </p:cNvSpPr>
+          <p:nvPr>
+            <p:ph type="sldImg" idx="2"/>
+          </p:nvPr>
+        </p:nvSpPr>
+        <p:spPr/>
+      </p:sp>
+      <p:sp>
+        <p:nvSpPr>
+          <p:cNvPr id="3" name="Notes Placeholder 2"/>
+          <p:cNvSpPr>
+            <a:spLocks noGrp="1"/>
+          </p:cNvSpPr>
+          <p:nvPr>
+            <p:ph type="body" idx="3" sz="quarter"/>
+          </p:nvPr>
+        </p:nvSpPr>
+        <p:spPr/>
+        <p:txBody>
+          <a:bodyPr/>
+          <a:lstStyle/>
+          <a:p>
+            <a:r>
+              <a:t>Hands-on: module4/examples/tlm/</a:t>
+            </a:r>
+          </a:p>
+        </p:txBody>
+      </p:sp>
+      <p:sp>
+        <p:nvSpPr>
+          <p:cNvPr id="4" name="Slide Number Placeholder 3"/>
+          <p:cNvSpPr>
+            <a:spLocks noGrp="1"/>
+          </p:cNvSpPr>
+          <p:nvPr>
+            <p:ph type="sldNum" idx="5" sz="quarter"/>
+          </p:nvPr>
+        </p:nvSpPr>
+        <p:spPr/>
+      </p:sp>
+    </p:spTree>
+  </p:cSld>
+  <p:clrMapOvr>
+    <a:masterClrMapping/>
+  </p:clrMapOvr>
+</p:notes>
+</file>
+
+<file path=ppt/notesSlides/notesSlide66.xml><?xml version="1.0" encoding="utf-8"?>
+<p:notes xmlns:a="http://schemas.openxmlformats.org/drawingml/2006/main" xmlns:p="http://schemas.openxmlformats.org/presentationml/2006/main" xmlns:r="http://schemas.openxmlformats.org/officeDocument/2006/relationships">
+  <p:cSld>
+    <p:spTree>
+      <p:nvGrpSpPr>
+        <p:cNvPr id="1" name=""/>
+        <p:cNvGrpSpPr/>
+        <p:nvPr/>
+      </p:nvGrpSpPr>
+      <p:grpSpPr>
+        <a:xfrm>
+          <a:off x="0" y="0"/>
+          <a:ext cx="0" cy="0"/>
+          <a:chOff x="0" y="0"/>
+          <a:chExt cx="0" cy="0"/>
+        </a:xfrm>
+      </p:grpSpPr>
+      <p:sp>
+        <p:nvSpPr>
+          <p:cNvPr id="2" name="Slide Image Placeholder 1"/>
+          <p:cNvSpPr>
+            <a:spLocks noGrp="1"/>
+          </p:cNvSpPr>
+          <p:nvPr>
+            <p:ph type="sldImg" idx="2"/>
+          </p:nvPr>
+        </p:nvSpPr>
+        <p:spPr/>
+      </p:sp>
+      <p:sp>
+        <p:nvSpPr>
+          <p:cNvPr id="3" name="Notes Placeholder 2"/>
+          <p:cNvSpPr>
+            <a:spLocks noGrp="1"/>
+          </p:cNvSpPr>
+          <p:nvPr>
+            <p:ph type="body" idx="3" sz="quarter"/>
+          </p:nvPr>
+        </p:nvSpPr>
+        <p:spPr/>
+        <p:txBody>
+          <a:bodyPr/>
+          <a:lstStyle/>
+          <a:p>
+            <a:r>
+              <a:t>module4/examples/scoreboards/README.md</a:t>
+            </a:r>
+          </a:p>
+        </p:txBody>
+      </p:sp>
+      <p:sp>
+        <p:nvSpPr>
+          <p:cNvPr id="4" name="Slide Number Placeholder 3"/>
+          <p:cNvSpPr>
+            <a:spLocks noGrp="1"/>
+          </p:cNvSpPr>
+          <p:nvPr>
+            <p:ph type="sldNum" idx="5" sz="quarter"/>
+          </p:nvPr>
+        </p:nvSpPr>
+        <p:spPr/>
+      </p:sp>
+    </p:spTree>
+  </p:cSld>
+  <p:clrMapOvr>
+    <a:masterClrMapping/>
+  </p:clrMapOvr>
+</p:notes>
+</file>
+
+<file path=ppt/notesSlides/notesSlide67.xml><?xml version="1.0" encoding="utf-8"?>
+<p:notes xmlns:a="http://schemas.openxmlformats.org/drawingml/2006/main" xmlns:p="http://schemas.openxmlformats.org/presentationml/2006/main" xmlns:r="http://schemas.openxmlformats.org/officeDocument/2006/relationships">
+  <p:cSld>
+    <p:spTree>
+      <p:nvGrpSpPr>
+        <p:cNvPr id="1" name=""/>
+        <p:cNvGrpSpPr/>
+        <p:nvPr/>
+      </p:nvGrpSpPr>
+      <p:grpSpPr>
+        <a:xfrm>
+          <a:off x="0" y="0"/>
+          <a:ext cx="0" cy="0"/>
+          <a:chOff x="0" y="0"/>
+          <a:chExt cx="0" cy="0"/>
+        </a:xfrm>
+      </p:grpSpPr>
+      <p:sp>
+        <p:nvSpPr>
+          <p:cNvPr id="2" name="Slide Image Placeholder 1"/>
+          <p:cNvSpPr>
+            <a:spLocks noGrp="1"/>
+          </p:cNvSpPr>
+          <p:nvPr>
+            <p:ph type="sldImg" idx="2"/>
+          </p:nvPr>
+        </p:nvSpPr>
+        <p:spPr/>
+      </p:sp>
+      <p:sp>
+        <p:nvSpPr>
+          <p:cNvPr id="3" name="Notes Placeholder 2"/>
+          <p:cNvSpPr>
+            <a:spLocks noGrp="1"/>
+          </p:cNvSpPr>
+          <p:nvPr>
+            <p:ph type="body" idx="3" sz="quarter"/>
+          </p:nvPr>
+        </p:nvSpPr>
+        <p:spPr/>
+        <p:txBody>
+          <a:bodyPr/>
+          <a:lstStyle/>
+          <a:p>
+            <a:r>
+              <a:t>Hands-on: module4/examples/scoreboards/</a:t>
+            </a:r>
+          </a:p>
+        </p:txBody>
+      </p:sp>
+      <p:sp>
+        <p:nvSpPr>
+          <p:cNvPr id="4" name="Slide Number Placeholder 3"/>
+          <p:cNvSpPr>
+            <a:spLocks noGrp="1"/>
+          </p:cNvSpPr>
+          <p:nvPr>
+            <p:ph type="sldNum" idx="5" sz="quarter"/>
+          </p:nvPr>
+        </p:nvSpPr>
+        <p:spPr/>
+      </p:sp>
+    </p:spTree>
+  </p:cSld>
+  <p:clrMapOvr>
+    <a:masterClrMapping/>
+  </p:clrMapOvr>
+</p:notes>
+</file>
+
+<file path=ppt/notesSlides/notesSlide68.xml><?xml version="1.0" encoding="utf-8"?>
+<p:notes xmlns:a="http://schemas.openxmlformats.org/drawingml/2006/main" xmlns:p="http://schemas.openxmlformats.org/presentationml/2006/main" xmlns:r="http://schemas.openxmlformats.org/officeDocument/2006/relationships">
+  <p:cSld>
+    <p:spTree>
+      <p:nvGrpSpPr>
+        <p:cNvPr id="1" name=""/>
+        <p:cNvGrpSpPr/>
+        <p:nvPr/>
+      </p:nvGrpSpPr>
+      <p:grpSpPr>
+        <a:xfrm>
+          <a:off x="0" y="0"/>
+          <a:ext cx="0" cy="0"/>
+          <a:chOff x="0" y="0"/>
+          <a:chExt cx="0" cy="0"/>
+        </a:xfrm>
+      </p:grpSpPr>
+      <p:sp>
+        <p:nvSpPr>
+          <p:cNvPr id="2" name="Slide Image Placeholder 1"/>
+          <p:cNvSpPr>
+            <a:spLocks noGrp="1"/>
+          </p:cNvSpPr>
+          <p:nvPr>
+            <p:ph type="sldImg" idx="2"/>
+          </p:nvPr>
+        </p:nvSpPr>
+        <p:spPr/>
+      </p:sp>
+      <p:sp>
+        <p:nvSpPr>
+          <p:cNvPr id="3" name="Notes Placeholder 2"/>
+          <p:cNvSpPr>
+            <a:spLocks noGrp="1"/>
+          </p:cNvSpPr>
+          <p:nvPr>
+            <p:ph type="body" idx="3" sz="quarter"/>
+          </p:nvPr>
+        </p:nvSpPr>
+        <p:spPr/>
+        <p:txBody>
+          <a:bodyPr/>
+          <a:lstStyle/>
+          <a:p>
+            <a:r>
+              <a:t>module4/examples/agents/README.md</a:t>
+            </a:r>
+          </a:p>
+        </p:txBody>
+      </p:sp>
+      <p:sp>
+        <p:nvSpPr>
+          <p:cNvPr id="4" name="Slide Number Placeholder 3"/>
+          <p:cNvSpPr>
+            <a:spLocks noGrp="1"/>
+          </p:cNvSpPr>
+          <p:nvPr>
+            <p:ph type="sldNum" idx="5" sz="quarter"/>
+          </p:nvPr>
+        </p:nvSpPr>
+        <p:spPr/>
+      </p:sp>
+    </p:spTree>
+  </p:cSld>
+  <p:clrMapOvr>
+    <a:masterClrMapping/>
+  </p:clrMapOvr>
+</p:notes>
+</file>
+
+<file path=ppt/notesSlides/notesSlide69.xml><?xml version="1.0" encoding="utf-8"?>
+<p:notes xmlns:a="http://schemas.openxmlformats.org/drawingml/2006/main" xmlns:p="http://schemas.openxmlformats.org/presentationml/2006/main" xmlns:r="http://schemas.openxmlformats.org/officeDocument/2006/relationships">
+  <p:cSld>
+    <p:spTree>
+      <p:nvGrpSpPr>
+        <p:cNvPr id="1" name=""/>
+        <p:cNvGrpSpPr/>
+        <p:nvPr/>
+      </p:nvGrpSpPr>
+      <p:grpSpPr>
+        <a:xfrm>
+          <a:off x="0" y="0"/>
+          <a:ext cx="0" cy="0"/>
+          <a:chOff x="0" y="0"/>
+          <a:chExt cx="0" cy="0"/>
+        </a:xfrm>
+      </p:grpSpPr>
+      <p:sp>
+        <p:nvSpPr>
+          <p:cNvPr id="2" name="Slide Image Placeholder 1"/>
+          <p:cNvSpPr>
+            <a:spLocks noGrp="1"/>
+          </p:cNvSpPr>
+          <p:nvPr>
+            <p:ph type="sldImg" idx="2"/>
+          </p:nvPr>
+        </p:nvSpPr>
+        <p:spPr/>
+      </p:sp>
+      <p:sp>
+        <p:nvSpPr>
+          <p:cNvPr id="3" name="Notes Placeholder 2"/>
+          <p:cNvSpPr>
+            <a:spLocks noGrp="1"/>
+          </p:cNvSpPr>
+          <p:nvPr>
+            <p:ph type="body" idx="3" sz="quarter"/>
+          </p:nvPr>
+        </p:nvSpPr>
+        <p:spPr/>
+        <p:txBody>
+          <a:bodyPr/>
+          <a:lstStyle/>
+          <a:p>
+            <a:r>
+              <a:t>Hands-on: module4/examples/agents/</a:t>
             </a:r>
           </a:p>
         </p:txBody>
@@ -4210,6 +5206,146 @@
           <a:p>
             <a:r>
               <a:t>From MODULE4 Topics Covered.</a:t>
+            </a:r>
+          </a:p>
+        </p:txBody>
+      </p:sp>
+      <p:sp>
+        <p:nvSpPr>
+          <p:cNvPr id="4" name="Slide Number Placeholder 3"/>
+          <p:cNvSpPr>
+            <a:spLocks noGrp="1"/>
+          </p:cNvSpPr>
+          <p:nvPr>
+            <p:ph type="sldNum" idx="5" sz="quarter"/>
+          </p:nvPr>
+        </p:nvSpPr>
+        <p:spPr/>
+      </p:sp>
+    </p:spTree>
+  </p:cSld>
+  <p:clrMapOvr>
+    <a:masterClrMapping/>
+  </p:clrMapOvr>
+</p:notes>
+</file>
+
+<file path=ppt/notesSlides/notesSlide70.xml><?xml version="1.0" encoding="utf-8"?>
+<p:notes xmlns:a="http://schemas.openxmlformats.org/drawingml/2006/main" xmlns:p="http://schemas.openxmlformats.org/presentationml/2006/main" xmlns:r="http://schemas.openxmlformats.org/officeDocument/2006/relationships">
+  <p:cSld>
+    <p:spTree>
+      <p:nvGrpSpPr>
+        <p:cNvPr id="1" name=""/>
+        <p:cNvGrpSpPr/>
+        <p:nvPr/>
+      </p:nvGrpSpPr>
+      <p:grpSpPr>
+        <a:xfrm>
+          <a:off x="0" y="0"/>
+          <a:ext cx="0" cy="0"/>
+          <a:chOff x="0" y="0"/>
+          <a:chExt cx="0" cy="0"/>
+        </a:xfrm>
+      </p:grpSpPr>
+      <p:sp>
+        <p:nvSpPr>
+          <p:cNvPr id="2" name="Slide Image Placeholder 1"/>
+          <p:cNvSpPr>
+            <a:spLocks noGrp="1"/>
+          </p:cNvSpPr>
+          <p:nvPr>
+            <p:ph type="sldImg" idx="2"/>
+          </p:nvPr>
+        </p:nvSpPr>
+        <p:spPr/>
+      </p:sp>
+      <p:sp>
+        <p:nvSpPr>
+          <p:cNvPr id="3" name="Notes Placeholder 2"/>
+          <p:cNvSpPr>
+            <a:spLocks noGrp="1"/>
+          </p:cNvSpPr>
+          <p:nvPr>
+            <p:ph type="body" idx="3" sz="quarter"/>
+          </p:nvPr>
+        </p:nvSpPr>
+        <p:spPr/>
+        <p:txBody>
+          <a:bodyPr/>
+          <a:lstStyle/>
+          <a:p>
+            <a:r>
+              <a:t>From MODULE4 Learning Outcomes.</a:t>
+            </a:r>
+          </a:p>
+        </p:txBody>
+      </p:sp>
+      <p:sp>
+        <p:nvSpPr>
+          <p:cNvPr id="4" name="Slide Number Placeholder 3"/>
+          <p:cNvSpPr>
+            <a:spLocks noGrp="1"/>
+          </p:cNvSpPr>
+          <p:nvPr>
+            <p:ph type="sldNum" idx="5" sz="quarter"/>
+          </p:nvPr>
+        </p:nvSpPr>
+        <p:spPr/>
+      </p:sp>
+    </p:spTree>
+  </p:cSld>
+  <p:clrMapOvr>
+    <a:masterClrMapping/>
+  </p:clrMapOvr>
+</p:notes>
+</file>
+
+<file path=ppt/notesSlides/notesSlide71.xml><?xml version="1.0" encoding="utf-8"?>
+<p:notes xmlns:a="http://schemas.openxmlformats.org/drawingml/2006/main" xmlns:p="http://schemas.openxmlformats.org/presentationml/2006/main" xmlns:r="http://schemas.openxmlformats.org/officeDocument/2006/relationships">
+  <p:cSld>
+    <p:spTree>
+      <p:nvGrpSpPr>
+        <p:cNvPr id="1" name=""/>
+        <p:cNvGrpSpPr/>
+        <p:nvPr/>
+      </p:nvGrpSpPr>
+      <p:grpSpPr>
+        <a:xfrm>
+          <a:off x="0" y="0"/>
+          <a:ext cx="0" cy="0"/>
+          <a:chOff x="0" y="0"/>
+          <a:chExt cx="0" cy="0"/>
+        </a:xfrm>
+      </p:grpSpPr>
+      <p:sp>
+        <p:nvSpPr>
+          <p:cNvPr id="2" name="Slide Image Placeholder 1"/>
+          <p:cNvSpPr>
+            <a:spLocks noGrp="1"/>
+          </p:cNvSpPr>
+          <p:nvPr>
+            <p:ph type="sldImg" idx="2"/>
+          </p:nvPr>
+        </p:nvSpPr>
+        <p:spPr/>
+      </p:sp>
+      <p:sp>
+        <p:nvSpPr>
+          <p:cNvPr id="3" name="Notes Placeholder 2"/>
+          <p:cNvSpPr>
+            <a:spLocks noGrp="1"/>
+          </p:cNvSpPr>
+          <p:nvPr>
+            <p:ph type="body" idx="3" sz="quarter"/>
+          </p:nvPr>
+        </p:nvSpPr>
+        <p:spPr/>
+        <p:txBody>
+          <a:bodyPr/>
+          <a:lstStyle/>
+          <a:p>
+            <a:r>
+              <a:t>From MODULE4 Learning Outcomes.</a:t>
             </a:r>
           </a:p>
         </p:txBody>
@@ -21016,7 +22152,7 @@
               </a:defRPr>
             </a:pPr>
             <a:r>
-              <a:t>$ ./scripts/module4.sh --check</a:t>
+              <a:t>$ ./scripts/module4.sh --transactions</a:t>
             </a:r>
           </a:p>
         </p:txBody>
@@ -21250,8 +22386,8 @@
         </p:nvSpPr>
         <p:spPr>
           <a:xfrm>
-            <a:off x="548640" y="2743200"/>
-            <a:ext cx="11064240" cy="1371600"/>
+            <a:off x="548640" y="411480"/>
+            <a:ext cx="11064240" cy="777240"/>
           </a:xfrm>
           <a:prstGeom prst="rect">
             <a:avLst/>
@@ -21264,11 +22400,11 @@
           </a:bodyPr>
           <a:lstStyle/>
           <a:p>
-            <a:pPr algn="ctr">
-              <a:lnSpc>
-                <a:spcPts val="2200"/>
-              </a:lnSpc>
-              <a:defRPr sz="3600" b="1">
+            <a:pPr>
+              <a:lnSpc>
+                <a:spcPts val="2200"/>
+              </a:lnSpc>
+              <a:defRPr sz="2800" b="1">
                 <a:solidFill>
                   <a:srgbClr val="1A1A2E"/>
                 </a:solidFill>
@@ -21276,7 +22412,7 @@
               </a:defRPr>
             </a:pPr>
             <a:r>
-              <a:t>Practice &amp; assessment</a:t>
+              <a:t>Example 1: Transactions</a:t>
             </a:r>
           </a:p>
         </p:txBody>
@@ -21284,6 +22420,143 @@
       <p:sp>
         <p:nvSpPr>
           <p:cNvPr id="3" name="TextBox 2"/>
+          <p:cNvSpPr txBox="1"/>
+          <p:nvPr/>
+        </p:nvSpPr>
+        <p:spPr>
+          <a:xfrm>
+            <a:off x="548640" y="1234440"/>
+            <a:ext cx="11064240" cy="4937760"/>
+          </a:xfrm>
+          <a:prstGeom prst="rect">
+            <a:avLst/>
+          </a:prstGeom>
+          <a:noFill/>
+        </p:spPr>
+        <p:txBody>
+          <a:bodyPr wrap="square">
+            <a:noAutofit/>
+          </a:bodyPr>
+          <a:lstStyle/>
+          <a:p>
+            <a:pPr>
+              <a:lnSpc>
+                <a:spcPts val="2200"/>
+              </a:lnSpc>
+              <a:spcAft>
+                <a:spcPts val="1000"/>
+              </a:spcAft>
+              <a:defRPr sz="2000" b="0">
+                <a:solidFill>
+                  <a:srgbClr val="333333"/>
+                </a:solidFill>
+                <a:latin typeface="Calibri"/>
+              </a:defRPr>
+            </a:pPr>
+            <a:r>
+              <a:t>• BaseTransaction: Basic transaction with `data` and</a:t>
+            </a:r>
+          </a:p>
+          <a:p>
+            <a:pPr>
+              <a:lnSpc>
+                <a:spcPts val="2200"/>
+              </a:lnSpc>
+              <a:spcAft>
+                <a:spcPts val="1000"/>
+              </a:spcAft>
+              <a:defRPr sz="2000" b="0">
+                <a:solidFill>
+                  <a:srgbClr val="333333"/>
+                </a:solidFill>
+                <a:latin typeface="Calibri"/>
+              </a:defRPr>
+            </a:pPr>
+            <a:r>
+              <a:t>      `address` fields</a:t>
+            </a:r>
+          </a:p>
+          <a:p>
+            <a:pPr>
+              <a:lnSpc>
+                <a:spcPts val="2200"/>
+              </a:lnSpc>
+              <a:spcAft>
+                <a:spcPts val="1000"/>
+              </a:spcAft>
+              <a:defRPr sz="2000" b="0">
+                <a:solidFill>
+                  <a:srgbClr val="333333"/>
+                </a:solidFill>
+                <a:latin typeface="Calibri"/>
+              </a:defRPr>
+            </a:pPr>
+            <a:r>
+              <a:t>• ExtendedTransaction: Extended transaction with</a:t>
+            </a:r>
+          </a:p>
+          <a:p>
+            <a:pPr>
+              <a:lnSpc>
+                <a:spcPts val="2200"/>
+              </a:lnSpc>
+              <a:spcAft>
+                <a:spcPts val="1000"/>
+              </a:spcAft>
+              <a:defRPr sz="2000" b="0">
+                <a:solidFill>
+                  <a:srgbClr val="333333"/>
+                </a:solidFill>
+                <a:latin typeface="Calibri"/>
+              </a:defRPr>
+            </a:pPr>
+            <a:r>
+              <a:t>      `control` and `status` fields</a:t>
+            </a:r>
+          </a:p>
+          <a:p>
+            <a:pPr>
+              <a:lnSpc>
+                <a:spcPts val="2200"/>
+              </a:lnSpc>
+              <a:spcAft>
+                <a:spcPts val="1000"/>
+              </a:spcAft>
+              <a:defRPr sz="2000" b="0">
+                <a:solidFill>
+                  <a:srgbClr val="333333"/>
+                </a:solidFill>
+                <a:latin typeface="Calibri"/>
+              </a:defRPr>
+            </a:pPr>
+            <a:r>
+              <a:t>• ConstrainedTransaction: Transaction with</a:t>
+            </a:r>
+          </a:p>
+          <a:p>
+            <a:pPr>
+              <a:lnSpc>
+                <a:spcPts val="2200"/>
+              </a:lnSpc>
+              <a:spcAft>
+                <a:spcPts val="1000"/>
+              </a:spcAft>
+              <a:defRPr sz="2000" b="0">
+                <a:solidFill>
+                  <a:srgbClr val="333333"/>
+                </a:solidFill>
+                <a:latin typeface="Calibri"/>
+              </a:defRPr>
+            </a:pPr>
+            <a:r>
+              <a:t>      randomization constraints</a:t>
+            </a:r>
+          </a:p>
+        </p:txBody>
+      </p:sp>
+      <p:sp>
+        <p:nvSpPr>
+          <p:cNvPr id="4" name="TextBox 3"/>
           <p:cNvSpPr txBox="1"/>
           <p:nvPr/>
         </p:nvSpPr>
@@ -21372,7 +22645,7 @@
               </a:defRPr>
             </a:pPr>
             <a:r>
-              <a:t>Exercises</a:t>
+              <a:t>Demo: Transactions</a:t>
             </a:r>
           </a:p>
         </p:txBody>
@@ -21385,13 +22658,15 @@
         </p:nvSpPr>
         <p:spPr>
           <a:xfrm>
-            <a:off x="548640" y="1234440"/>
-            <a:ext cx="11064240" cy="4937760"/>
+            <a:off x="548640" y="1051560"/>
+            <a:ext cx="11064240" cy="914400"/>
           </a:xfrm>
           <a:prstGeom prst="rect">
             <a:avLst/>
           </a:prstGeom>
-          <a:noFill/>
+          <a:solidFill>
+            <a:srgbClr val="F4F4F4"/>
+          </a:solidFill>
         </p:spPr>
         <p:txBody>
           <a:bodyPr wrap="square">
@@ -21404,100 +22679,48 @@
                 <a:spcPts val="2200"/>
               </a:lnSpc>
               <a:spcAft>
-                <a:spcPts val="1000"/>
-              </a:spcAft>
-              <a:defRPr sz="2000" b="0">
-                <a:solidFill>
-                  <a:srgbClr val="333333"/>
-                </a:solidFill>
-                <a:latin typeface="Calibri"/>
-              </a:defRPr>
-            </a:pPr>
-            <a:r>
-              <a:t>• Transaction Modeling</a:t>
-            </a:r>
-          </a:p>
-          <a:p>
-            <a:pPr>
-              <a:lnSpc>
-                <a:spcPts val="2200"/>
-              </a:lnSpc>
-              <a:spcAft>
-                <a:spcPts val="1000"/>
-              </a:spcAft>
-              <a:defRPr sz="2000" b="0">
-                <a:solidFill>
-                  <a:srgbClr val="333333"/>
-                </a:solidFill>
-                <a:latin typeface="Calibri"/>
-              </a:defRPr>
-            </a:pPr>
-            <a:r>
-              <a:t>• Driver Implementation</a:t>
-            </a:r>
-          </a:p>
-          <a:p>
-            <a:pPr>
-              <a:lnSpc>
-                <a:spcPts val="2200"/>
-              </a:lnSpc>
-              <a:spcAft>
-                <a:spcPts val="1000"/>
-              </a:spcAft>
-              <a:defRPr sz="2000" b="0">
-                <a:solidFill>
-                  <a:srgbClr val="333333"/>
-                </a:solidFill>
-                <a:latin typeface="Calibri"/>
-              </a:defRPr>
-            </a:pPr>
-            <a:r>
-              <a:t>• Monitor Implementation</a:t>
-            </a:r>
-          </a:p>
-          <a:p>
-            <a:pPr>
-              <a:lnSpc>
-                <a:spcPts val="2200"/>
-              </a:lnSpc>
-              <a:spcAft>
-                <a:spcPts val="1000"/>
-              </a:spcAft>
-              <a:defRPr sz="2000" b="0">
-                <a:solidFill>
-                  <a:srgbClr val="333333"/>
-                </a:solidFill>
-                <a:latin typeface="Calibri"/>
-              </a:defRPr>
-            </a:pPr>
-            <a:r>
-              <a:t>• Sequencer and Sequences</a:t>
-            </a:r>
-          </a:p>
-          <a:p>
-            <a:pPr>
-              <a:lnSpc>
-                <a:spcPts val="2200"/>
-              </a:lnSpc>
-              <a:spcAft>
-                <a:spcPts val="1000"/>
-              </a:spcAft>
-              <a:defRPr sz="2000" b="0">
-                <a:solidFill>
-                  <a:srgbClr val="333333"/>
-                </a:solidFill>
-                <a:latin typeface="Calibri"/>
-              </a:defRPr>
-            </a:pPr>
-            <a:r>
-              <a:t>• TLM Communication</a:t>
-            </a:r>
-          </a:p>
-        </p:txBody>
-      </p:sp>
-      <p:sp>
-        <p:nvSpPr>
-          <p:cNvPr id="4" name="TextBox 3"/>
+                <a:spcPts val="200"/>
+              </a:spcAft>
+              <a:defRPr sz="2000" b="0">
+                <a:solidFill>
+                  <a:srgbClr val="333333"/>
+                </a:solidFill>
+                <a:latin typeface="Consolas"/>
+              </a:defRPr>
+            </a:pPr>
+            <a:r>
+              <a:t>$ ./scripts/module4.sh --transactions</a:t>
+            </a:r>
+          </a:p>
+        </p:txBody>
+      </p:sp>
+      <p:pic>
+        <p:nvPicPr>
+          <p:cNvPr id="4" name="Picture 3" descr="ex01_transactions.png"/>
+          <p:cNvPicPr>
+            <a:picLocks noChangeAspect="1"/>
+          </p:cNvPicPr>
+          <p:nvPr/>
+        </p:nvPicPr>
+        <p:blipFill>
+          <a:blip r:embed="rId2"/>
+          <a:stretch>
+            <a:fillRect/>
+          </a:stretch>
+        </p:blipFill>
+        <p:spPr>
+          <a:xfrm>
+            <a:off x="548640" y="1965960"/>
+            <a:ext cx="7071358" cy="3977639"/>
+          </a:xfrm>
+          <a:prstGeom prst="rect">
+            <a:avLst/>
+          </a:prstGeom>
+        </p:spPr>
+      </p:pic>
+      <p:sp>
+        <p:nvSpPr>
+          <p:cNvPr id="5" name="TextBox 4"/>
           <p:cNvSpPr txBox="1"/>
           <p:nvPr/>
         </p:nvSpPr>
@@ -21586,7 +22809,7 @@
               </a:defRPr>
             </a:pPr>
             <a:r>
-              <a:t>Exercises</a:t>
+              <a:t>Example 2: Drivers</a:t>
             </a:r>
           </a:p>
         </p:txBody>
@@ -21628,26 +22851,102 @@
               </a:defRPr>
             </a:pPr>
             <a:r>
-              <a:t>• Scoreboards</a:t>
-            </a:r>
-          </a:p>
-          <a:p>
-            <a:pPr>
-              <a:lnSpc>
-                <a:spcPts val="2200"/>
-              </a:lnSpc>
-              <a:spcAft>
-                <a:spcPts val="1000"/>
-              </a:spcAft>
-              <a:defRPr sz="2000" b="0">
-                <a:solidFill>
-                  <a:srgbClr val="333333"/>
-                </a:solidFill>
-                <a:latin typeface="Calibri"/>
-              </a:defRPr>
-            </a:pPr>
-            <a:r>
-              <a:t>• Complete Agents</a:t>
+              <a:t>• SimpleDriver: Basic driver implementation with</a:t>
+            </a:r>
+          </a:p>
+          <a:p>
+            <a:pPr>
+              <a:lnSpc>
+                <a:spcPts val="2200"/>
+              </a:lnSpc>
+              <a:spcAft>
+                <a:spcPts val="1000"/>
+              </a:spcAft>
+              <a:defRPr sz="2000" b="0">
+                <a:solidFill>
+                  <a:srgbClr val="333333"/>
+                </a:solidFill>
+                <a:latin typeface="Calibri"/>
+              </a:defRPr>
+            </a:pPr>
+            <a:r>
+              <a:t>      transaction reception</a:t>
+            </a:r>
+          </a:p>
+          <a:p>
+            <a:pPr>
+              <a:lnSpc>
+                <a:spcPts val="2200"/>
+              </a:lnSpc>
+              <a:spcAft>
+                <a:spcPts val="1000"/>
+              </a:spcAft>
+              <a:defRPr sz="2000" b="0">
+                <a:solidFill>
+                  <a:srgbClr val="333333"/>
+                </a:solidFill>
+                <a:latin typeface="Calibri"/>
+              </a:defRPr>
+            </a:pPr>
+            <a:r>
+              <a:t>• ProtocolDriver: Protocol-aware driver with</a:t>
+            </a:r>
+          </a:p>
+          <a:p>
+            <a:pPr>
+              <a:lnSpc>
+                <a:spcPts val="2200"/>
+              </a:lnSpc>
+              <a:spcAft>
+                <a:spcPts val="1000"/>
+              </a:spcAft>
+              <a:defRPr sz="2000" b="0">
+                <a:solidFill>
+                  <a:srgbClr val="333333"/>
+                </a:solidFill>
+                <a:latin typeface="Calibri"/>
+              </a:defRPr>
+            </a:pPr>
+            <a:r>
+              <a:t>      handshaking</a:t>
+            </a:r>
+          </a:p>
+          <a:p>
+            <a:pPr>
+              <a:lnSpc>
+                <a:spcPts val="2200"/>
+              </a:lnSpc>
+              <a:spcAft>
+                <a:spcPts val="1000"/>
+              </a:spcAft>
+              <a:defRPr sz="2000" b="0">
+                <a:solidFill>
+                  <a:srgbClr val="333333"/>
+                </a:solidFill>
+                <a:latin typeface="Calibri"/>
+              </a:defRPr>
+            </a:pPr>
+            <a:r>
+              <a:t>• Driver-Sequencer Communication: Using</a:t>
+            </a:r>
+          </a:p>
+          <a:p>
+            <a:pPr>
+              <a:lnSpc>
+                <a:spcPts val="2200"/>
+              </a:lnSpc>
+              <a:spcAft>
+                <a:spcPts val="1000"/>
+              </a:spcAft>
+              <a:defRPr sz="2000" b="0">
+                <a:solidFill>
+                  <a:srgbClr val="333333"/>
+                </a:solidFill>
+                <a:latin typeface="Calibri"/>
+              </a:defRPr>
+            </a:pPr>
+            <a:r>
+              <a:t>      `seq_item_port` for transaction flow</a:t>
             </a:r>
           </a:p>
         </p:txBody>
@@ -21743,7 +23042,7 @@
               </a:defRPr>
             </a:pPr>
             <a:r>
-              <a:t>Assessment checklist</a:t>
+              <a:t>Demo: Drivers</a:t>
             </a:r>
           </a:p>
         </p:txBody>
@@ -21756,13 +23055,15 @@
         </p:nvSpPr>
         <p:spPr>
           <a:xfrm>
-            <a:off x="548640" y="1234440"/>
-            <a:ext cx="11064240" cy="4937760"/>
+            <a:off x="548640" y="1051560"/>
+            <a:ext cx="11064240" cy="914400"/>
           </a:xfrm>
           <a:prstGeom prst="rect">
             <a:avLst/>
           </a:prstGeom>
-          <a:noFill/>
+          <a:solidFill>
+            <a:srgbClr val="F4F4F4"/>
+          </a:solidFill>
         </p:spPr>
         <p:txBody>
           <a:bodyPr wrap="square">
@@ -21775,119 +23076,48 @@
                 <a:spcPts val="2200"/>
               </a:lnSpc>
               <a:spcAft>
-                <a:spcPts val="1000"/>
-              </a:spcAft>
-              <a:defRPr sz="2000" b="0">
-                <a:solidFill>
-                  <a:srgbClr val="333333"/>
-                </a:solidFill>
-                <a:latin typeface="Calibri"/>
-              </a:defRPr>
-            </a:pPr>
-            <a:r>
-              <a:t>• Can design and implement transaction classes</a:t>
-            </a:r>
-          </a:p>
-          <a:p>
-            <a:pPr>
-              <a:lnSpc>
-                <a:spcPts val="2200"/>
-              </a:lnSpc>
-              <a:spcAft>
-                <a:spcPts val="1000"/>
-              </a:spcAft>
-              <a:defRPr sz="2000" b="0">
-                <a:solidFill>
-                  <a:srgbClr val="333333"/>
-                </a:solidFill>
-                <a:latin typeface="Calibri"/>
-              </a:defRPr>
-            </a:pPr>
-            <a:r>
-              <a:t>• Can create drivers for DUT stimulus</a:t>
-            </a:r>
-          </a:p>
-          <a:p>
-            <a:pPr>
-              <a:lnSpc>
-                <a:spcPts val="2200"/>
-              </a:lnSpc>
-              <a:spcAft>
-                <a:spcPts val="1000"/>
-              </a:spcAft>
-              <a:defRPr sz="2000" b="0">
-                <a:solidFill>
-                  <a:srgbClr val="333333"/>
-                </a:solidFill>
-                <a:latin typeface="Calibri"/>
-              </a:defRPr>
-            </a:pPr>
-            <a:r>
-              <a:t>• Can implement monitors for DUT observation</a:t>
-            </a:r>
-          </a:p>
-          <a:p>
-            <a:pPr>
-              <a:lnSpc>
-                <a:spcPts val="2200"/>
-              </a:lnSpc>
-              <a:spcAft>
-                <a:spcPts val="1000"/>
-              </a:spcAft>
-              <a:defRPr sz="2000" b="0">
-                <a:solidFill>
-                  <a:srgbClr val="333333"/>
-                </a:solidFill>
-                <a:latin typeface="Calibri"/>
-              </a:defRPr>
-            </a:pPr>
-            <a:r>
-              <a:t>• Can build sequencers and sequences</a:t>
-            </a:r>
-          </a:p>
-          <a:p>
-            <a:pPr>
-              <a:lnSpc>
-                <a:spcPts val="2200"/>
-              </a:lnSpc>
-              <a:spcAft>
-                <a:spcPts val="1000"/>
-              </a:spcAft>
-              <a:defRPr sz="2000" b="0">
-                <a:solidFill>
-                  <a:srgbClr val="333333"/>
-                </a:solidFill>
-                <a:latin typeface="Calibri"/>
-              </a:defRPr>
-            </a:pPr>
-            <a:r>
-              <a:t>• Can use TLM for component communication</a:t>
-            </a:r>
-          </a:p>
-          <a:p>
-            <a:pPr>
-              <a:lnSpc>
-                <a:spcPts val="2200"/>
-              </a:lnSpc>
-              <a:spcAft>
-                <a:spcPts val="1000"/>
-              </a:spcAft>
-              <a:defRPr sz="2000" b="0">
-                <a:solidFill>
-                  <a:srgbClr val="333333"/>
-                </a:solidFill>
-                <a:latin typeface="Calibri"/>
-              </a:defRPr>
-            </a:pPr>
-            <a:r>
-              <a:t>• Can create scoreboards for result checking</a:t>
-            </a:r>
-          </a:p>
-        </p:txBody>
-      </p:sp>
-      <p:sp>
-        <p:nvSpPr>
-          <p:cNvPr id="4" name="TextBox 3"/>
+                <a:spcPts val="200"/>
+              </a:spcAft>
+              <a:defRPr sz="2000" b="0">
+                <a:solidFill>
+                  <a:srgbClr val="333333"/>
+                </a:solidFill>
+                <a:latin typeface="Consolas"/>
+              </a:defRPr>
+            </a:pPr>
+            <a:r>
+              <a:t>$ ./scripts/module4.sh --drivers</a:t>
+            </a:r>
+          </a:p>
+        </p:txBody>
+      </p:sp>
+      <p:pic>
+        <p:nvPicPr>
+          <p:cNvPr id="4" name="Picture 3" descr="ex02_drivers.png"/>
+          <p:cNvPicPr>
+            <a:picLocks noChangeAspect="1"/>
+          </p:cNvPicPr>
+          <p:nvPr/>
+        </p:nvPicPr>
+        <p:blipFill>
+          <a:blip r:embed="rId2"/>
+          <a:stretch>
+            <a:fillRect/>
+          </a:stretch>
+        </p:blipFill>
+        <p:spPr>
+          <a:xfrm>
+            <a:off x="548640" y="1965960"/>
+            <a:ext cx="7071358" cy="3977639"/>
+          </a:xfrm>
+          <a:prstGeom prst="rect">
+            <a:avLst/>
+          </a:prstGeom>
+        </p:spPr>
+      </p:pic>
+      <p:sp>
+        <p:nvSpPr>
+          <p:cNvPr id="5" name="TextBox 4"/>
           <p:cNvSpPr txBox="1"/>
           <p:nvPr/>
         </p:nvSpPr>
@@ -21976,7 +23206,7 @@
               </a:defRPr>
             </a:pPr>
             <a:r>
-              <a:t>Summary &amp; next steps</a:t>
+              <a:t>Example 3: Monitors</a:t>
             </a:r>
           </a:p>
         </p:txBody>
@@ -22018,83 +23248,102 @@
               </a:defRPr>
             </a:pPr>
             <a:r>
-              <a:t>• Build complete UVM agents with driver, monitor, and</a:t>
-            </a:r>
-          </a:p>
-          <a:p>
-            <a:pPr>
-              <a:lnSpc>
-                <a:spcPts val="2200"/>
-              </a:lnSpc>
-              <a:spcAft>
-                <a:spcPts val="1000"/>
-              </a:spcAft>
-              <a:defRPr sz="2000" b="0">
-                <a:solidFill>
-                  <a:srgbClr val="333333"/>
-                </a:solidFill>
-                <a:latin typeface="Calibri"/>
-              </a:defRPr>
-            </a:pPr>
-            <a:r>
-              <a:t>      sequencer</a:t>
-            </a:r>
-          </a:p>
-          <a:p>
-            <a:pPr>
-              <a:lnSpc>
-                <a:spcPts val="2200"/>
-              </a:lnSpc>
-              <a:spcAft>
-                <a:spcPts val="1000"/>
-              </a:spcAft>
-              <a:defRPr sz="2000" b="0">
-                <a:solidFill>
-                  <a:srgbClr val="333333"/>
-                </a:solidFill>
-                <a:latin typeface="Calibri"/>
-              </a:defRPr>
-            </a:pPr>
-            <a:r>
-              <a:t>• Complete module4/CHECKLIST.md</a:t>
-            </a:r>
-          </a:p>
-          <a:p>
-            <a:pPr>
-              <a:lnSpc>
-                <a:spcPts val="2200"/>
-              </a:lnSpc>
-              <a:spcAft>
-                <a:spcPts val="1000"/>
-              </a:spcAft>
-              <a:defRPr sz="2000" b="0">
-                <a:solidFill>
-                  <a:srgbClr val="333333"/>
-                </a:solidFill>
-                <a:latin typeface="Calibri"/>
-              </a:defRPr>
-            </a:pPr>
-            <a:r>
-              <a:t>• Run ./scripts/module4.sh --check</a:t>
-            </a:r>
-          </a:p>
-          <a:p>
-            <a:pPr>
-              <a:lnSpc>
-                <a:spcPts val="2200"/>
-              </a:lnSpc>
-              <a:spcAft>
-                <a:spcPts val="1000"/>
-              </a:spcAft>
-              <a:defRPr sz="2000" b="0">
-                <a:solidFill>
-                  <a:srgbClr val="333333"/>
-                </a:solidFill>
-                <a:latin typeface="Calibri"/>
-              </a:defRPr>
-            </a:pPr>
-            <a:r>
-              <a:t>• Next: Next module in course</a:t>
+              <a:t>• SimpleMonitor: Basic monitor implementation with</a:t>
+            </a:r>
+          </a:p>
+          <a:p>
+            <a:pPr>
+              <a:lnSpc>
+                <a:spcPts val="2200"/>
+              </a:lnSpc>
+              <a:spcAft>
+                <a:spcPts val="1000"/>
+              </a:spcAft>
+              <a:defRPr sz="2000" b="0">
+                <a:solidFill>
+                  <a:srgbClr val="333333"/>
+                </a:solidFill>
+                <a:latin typeface="Calibri"/>
+              </a:defRPr>
+            </a:pPr>
+            <a:r>
+              <a:t>      signal sampling</a:t>
+            </a:r>
+          </a:p>
+          <a:p>
+            <a:pPr>
+              <a:lnSpc>
+                <a:spcPts val="2200"/>
+              </a:lnSpc>
+              <a:spcAft>
+                <a:spcPts val="1000"/>
+              </a:spcAft>
+              <a:defRPr sz="2000" b="0">
+                <a:solidFill>
+                  <a:srgbClr val="333333"/>
+                </a:solidFill>
+                <a:latin typeface="Calibri"/>
+              </a:defRPr>
+            </a:pPr>
+            <a:r>
+              <a:t>• ProtocolMonitor: Protocol-aware monitor with</a:t>
+            </a:r>
+          </a:p>
+          <a:p>
+            <a:pPr>
+              <a:lnSpc>
+                <a:spcPts val="2200"/>
+              </a:lnSpc>
+              <a:spcAft>
+                <a:spcPts val="1000"/>
+              </a:spcAft>
+              <a:defRPr sz="2000" b="0">
+                <a:solidFill>
+                  <a:srgbClr val="333333"/>
+                </a:solidFill>
+                <a:latin typeface="Calibri"/>
+              </a:defRPr>
+            </a:pPr>
+            <a:r>
+              <a:t>      handshake monitoring</a:t>
+            </a:r>
+          </a:p>
+          <a:p>
+            <a:pPr>
+              <a:lnSpc>
+                <a:spcPts val="2200"/>
+              </a:lnSpc>
+              <a:spcAft>
+                <a:spcPts val="1000"/>
+              </a:spcAft>
+              <a:defRPr sz="2000" b="0">
+                <a:solidFill>
+                  <a:srgbClr val="333333"/>
+                </a:solidFill>
+                <a:latin typeface="Calibri"/>
+              </a:defRPr>
+            </a:pPr>
+            <a:r>
+              <a:t>• Transaction Creation: Creating transactions from</a:t>
+            </a:r>
+          </a:p>
+          <a:p>
+            <a:pPr>
+              <a:lnSpc>
+                <a:spcPts val="2200"/>
+              </a:lnSpc>
+              <a:spcAft>
+                <a:spcPts val="1000"/>
+              </a:spcAft>
+              <a:defRPr sz="2000" b="0">
+                <a:solidFill>
+                  <a:srgbClr val="333333"/>
+                </a:solidFill>
+                <a:latin typeface="Calibri"/>
+              </a:defRPr>
+            </a:pPr>
+            <a:r>
+              <a:t>      sampled signals</a:t>
             </a:r>
           </a:p>
         </p:txBody>
@@ -22102,6 +23351,170 @@
       <p:sp>
         <p:nvSpPr>
           <p:cNvPr id="4" name="TextBox 3"/>
+          <p:cNvSpPr txBox="1"/>
+          <p:nvPr/>
+        </p:nvSpPr>
+        <p:spPr>
+          <a:xfrm>
+            <a:off x="548640" y="6355080"/>
+            <a:ext cx="11064240" cy="320040"/>
+          </a:xfrm>
+          <a:prstGeom prst="rect">
+            <a:avLst/>
+          </a:prstGeom>
+          <a:noFill/>
+        </p:spPr>
+        <p:txBody>
+          <a:bodyPr wrap="square">
+            <a:noAutofit/>
+          </a:bodyPr>
+          <a:lstStyle/>
+          <a:p>
+            <a:pPr algn="r">
+              <a:lnSpc>
+                <a:spcPts val="2200"/>
+              </a:lnSpc>
+              <a:defRPr sz="1000" b="0">
+                <a:solidFill>
+                  <a:srgbClr val="666666"/>
+                </a:solidFill>
+                <a:latin typeface="Calibri"/>
+              </a:defRPr>
+            </a:pPr>
+            <a:r>
+              <a:t>learn_uvm2017_sv_verilator / Module 4</a:t>
+            </a:r>
+          </a:p>
+        </p:txBody>
+      </p:sp>
+    </p:spTree>
+  </p:cSld>
+  <p:clrMapOvr>
+    <a:masterClrMapping/>
+  </p:clrMapOvr>
+</p:sld>
+</file>
+
+<file path=ppt/slides/slide69.xml><?xml version="1.0" encoding="utf-8"?>
+<p:sld xmlns:a="http://schemas.openxmlformats.org/drawingml/2006/main" xmlns:p="http://schemas.openxmlformats.org/presentationml/2006/main" xmlns:r="http://schemas.openxmlformats.org/officeDocument/2006/relationships">
+  <p:cSld>
+    <p:spTree>
+      <p:nvGrpSpPr>
+        <p:cNvPr id="1" name=""/>
+        <p:cNvGrpSpPr/>
+        <p:nvPr/>
+      </p:nvGrpSpPr>
+      <p:grpSpPr/>
+      <p:sp>
+        <p:nvSpPr>
+          <p:cNvPr id="2" name="TextBox 1"/>
+          <p:cNvSpPr txBox="1"/>
+          <p:nvPr/>
+        </p:nvSpPr>
+        <p:spPr>
+          <a:xfrm>
+            <a:off x="548640" y="411480"/>
+            <a:ext cx="11064240" cy="777240"/>
+          </a:xfrm>
+          <a:prstGeom prst="rect">
+            <a:avLst/>
+          </a:prstGeom>
+          <a:noFill/>
+        </p:spPr>
+        <p:txBody>
+          <a:bodyPr wrap="square">
+            <a:noAutofit/>
+          </a:bodyPr>
+          <a:lstStyle/>
+          <a:p>
+            <a:pPr>
+              <a:lnSpc>
+                <a:spcPts val="2200"/>
+              </a:lnSpc>
+              <a:defRPr sz="2800" b="1">
+                <a:solidFill>
+                  <a:srgbClr val="1A1A2E"/>
+                </a:solidFill>
+                <a:latin typeface="Calibri"/>
+              </a:defRPr>
+            </a:pPr>
+            <a:r>
+              <a:t>Demo: Monitors</a:t>
+            </a:r>
+          </a:p>
+        </p:txBody>
+      </p:sp>
+      <p:sp>
+        <p:nvSpPr>
+          <p:cNvPr id="3" name="TextBox 2"/>
+          <p:cNvSpPr txBox="1"/>
+          <p:nvPr/>
+        </p:nvSpPr>
+        <p:spPr>
+          <a:xfrm>
+            <a:off x="548640" y="1051560"/>
+            <a:ext cx="11064240" cy="914400"/>
+          </a:xfrm>
+          <a:prstGeom prst="rect">
+            <a:avLst/>
+          </a:prstGeom>
+          <a:solidFill>
+            <a:srgbClr val="F4F4F4"/>
+          </a:solidFill>
+        </p:spPr>
+        <p:txBody>
+          <a:bodyPr wrap="square">
+            <a:noAutofit/>
+          </a:bodyPr>
+          <a:lstStyle/>
+          <a:p>
+            <a:pPr>
+              <a:lnSpc>
+                <a:spcPts val="2200"/>
+              </a:lnSpc>
+              <a:spcAft>
+                <a:spcPts val="200"/>
+              </a:spcAft>
+              <a:defRPr sz="2000" b="0">
+                <a:solidFill>
+                  <a:srgbClr val="333333"/>
+                </a:solidFill>
+                <a:latin typeface="Consolas"/>
+              </a:defRPr>
+            </a:pPr>
+            <a:r>
+              <a:t>$ ./scripts/module4.sh --monitors</a:t>
+            </a:r>
+          </a:p>
+        </p:txBody>
+      </p:sp>
+      <p:pic>
+        <p:nvPicPr>
+          <p:cNvPr id="4" name="Picture 3" descr="ex03_monitors.png"/>
+          <p:cNvPicPr>
+            <a:picLocks noChangeAspect="1"/>
+          </p:cNvPicPr>
+          <p:nvPr/>
+        </p:nvPicPr>
+        <p:blipFill>
+          <a:blip r:embed="rId2"/>
+          <a:stretch>
+            <a:fillRect/>
+          </a:stretch>
+        </p:blipFill>
+        <p:spPr>
+          <a:xfrm>
+            <a:off x="548640" y="1965960"/>
+            <a:ext cx="7071358" cy="3977639"/>
+          </a:xfrm>
+          <a:prstGeom prst="rect">
+            <a:avLst/>
+          </a:prstGeom>
+        </p:spPr>
+      </p:pic>
+      <p:sp>
+        <p:nvSpPr>
+          <p:cNvPr id="5" name="TextBox 4"/>
           <p:cNvSpPr txBox="1"/>
           <p:nvPr/>
         </p:nvSpPr>
@@ -22379,6 +23792,1885 @@
 </p:sld>
 </file>
 
+<file path=ppt/slides/slide70.xml><?xml version="1.0" encoding="utf-8"?>
+<p:sld xmlns:a="http://schemas.openxmlformats.org/drawingml/2006/main" xmlns:p="http://schemas.openxmlformats.org/presentationml/2006/main" xmlns:r="http://schemas.openxmlformats.org/officeDocument/2006/relationships">
+  <p:cSld>
+    <p:spTree>
+      <p:nvGrpSpPr>
+        <p:cNvPr id="1" name=""/>
+        <p:cNvGrpSpPr/>
+        <p:nvPr/>
+      </p:nvGrpSpPr>
+      <p:grpSpPr/>
+      <p:sp>
+        <p:nvSpPr>
+          <p:cNvPr id="2" name="TextBox 1"/>
+          <p:cNvSpPr txBox="1"/>
+          <p:nvPr/>
+        </p:nvSpPr>
+        <p:spPr>
+          <a:xfrm>
+            <a:off x="548640" y="411480"/>
+            <a:ext cx="11064240" cy="777240"/>
+          </a:xfrm>
+          <a:prstGeom prst="rect">
+            <a:avLst/>
+          </a:prstGeom>
+          <a:noFill/>
+        </p:spPr>
+        <p:txBody>
+          <a:bodyPr wrap="square">
+            <a:noAutofit/>
+          </a:bodyPr>
+          <a:lstStyle/>
+          <a:p>
+            <a:pPr>
+              <a:lnSpc>
+                <a:spcPts val="2200"/>
+              </a:lnSpc>
+              <a:defRPr sz="2800" b="1">
+                <a:solidFill>
+                  <a:srgbClr val="1A1A2E"/>
+                </a:solidFill>
+                <a:latin typeface="Calibri"/>
+              </a:defRPr>
+            </a:pPr>
+            <a:r>
+              <a:t>Example 4: Sequencers</a:t>
+            </a:r>
+          </a:p>
+        </p:txBody>
+      </p:sp>
+      <p:sp>
+        <p:nvSpPr>
+          <p:cNvPr id="3" name="TextBox 2"/>
+          <p:cNvSpPr txBox="1"/>
+          <p:nvPr/>
+        </p:nvSpPr>
+        <p:spPr>
+          <a:xfrm>
+            <a:off x="548640" y="1234440"/>
+            <a:ext cx="11064240" cy="4937760"/>
+          </a:xfrm>
+          <a:prstGeom prst="rect">
+            <a:avLst/>
+          </a:prstGeom>
+          <a:noFill/>
+        </p:spPr>
+        <p:txBody>
+          <a:bodyPr wrap="square">
+            <a:noAutofit/>
+          </a:bodyPr>
+          <a:lstStyle/>
+          <a:p>
+            <a:pPr>
+              <a:lnSpc>
+                <a:spcPts val="2200"/>
+              </a:lnSpc>
+              <a:spcAft>
+                <a:spcPts val="1000"/>
+              </a:spcAft>
+              <a:defRPr sz="2000" b="0">
+                <a:solidFill>
+                  <a:srgbClr val="333333"/>
+                </a:solidFill>
+                <a:latin typeface="Calibri"/>
+              </a:defRPr>
+            </a:pPr>
+            <a:r>
+              <a:t>• SimpleSequence: Basic sequence implementation</a:t>
+            </a:r>
+          </a:p>
+          <a:p>
+            <a:pPr>
+              <a:lnSpc>
+                <a:spcPts val="2200"/>
+              </a:lnSpc>
+              <a:spcAft>
+                <a:spcPts val="1000"/>
+              </a:spcAft>
+              <a:defRPr sz="2000" b="0">
+                <a:solidFill>
+                  <a:srgbClr val="333333"/>
+                </a:solidFill>
+                <a:latin typeface="Calibri"/>
+              </a:defRPr>
+            </a:pPr>
+            <a:r>
+              <a:t>• ExtendedSequence: Extended sequence with</a:t>
+            </a:r>
+          </a:p>
+          <a:p>
+            <a:pPr>
+              <a:lnSpc>
+                <a:spcPts val="2200"/>
+              </a:lnSpc>
+              <a:spcAft>
+                <a:spcPts val="1000"/>
+              </a:spcAft>
+              <a:defRPr sz="2000" b="0">
+                <a:solidFill>
+                  <a:srgbClr val="333333"/>
+                </a:solidFill>
+                <a:latin typeface="Calibri"/>
+              </a:defRPr>
+            </a:pPr>
+            <a:r>
+              <a:t>      configurable item count</a:t>
+            </a:r>
+          </a:p>
+          <a:p>
+            <a:pPr>
+              <a:lnSpc>
+                <a:spcPts val="2200"/>
+              </a:lnSpc>
+              <a:spcAft>
+                <a:spcPts val="1000"/>
+              </a:spcAft>
+              <a:defRPr sz="2000" b="0">
+                <a:solidFill>
+                  <a:srgbClr val="333333"/>
+                </a:solidFill>
+                <a:latin typeface="Calibri"/>
+              </a:defRPr>
+            </a:pPr>
+            <a:r>
+              <a:t>• Sequence Execution: Starting sequences on sequencers</a:t>
+            </a:r>
+          </a:p>
+        </p:txBody>
+      </p:sp>
+      <p:sp>
+        <p:nvSpPr>
+          <p:cNvPr id="4" name="TextBox 3"/>
+          <p:cNvSpPr txBox="1"/>
+          <p:nvPr/>
+        </p:nvSpPr>
+        <p:spPr>
+          <a:xfrm>
+            <a:off x="548640" y="6355080"/>
+            <a:ext cx="11064240" cy="320040"/>
+          </a:xfrm>
+          <a:prstGeom prst="rect">
+            <a:avLst/>
+          </a:prstGeom>
+          <a:noFill/>
+        </p:spPr>
+        <p:txBody>
+          <a:bodyPr wrap="square">
+            <a:noAutofit/>
+          </a:bodyPr>
+          <a:lstStyle/>
+          <a:p>
+            <a:pPr algn="r">
+              <a:lnSpc>
+                <a:spcPts val="2200"/>
+              </a:lnSpc>
+              <a:defRPr sz="1000" b="0">
+                <a:solidFill>
+                  <a:srgbClr val="666666"/>
+                </a:solidFill>
+                <a:latin typeface="Calibri"/>
+              </a:defRPr>
+            </a:pPr>
+            <a:r>
+              <a:t>learn_uvm2017_sv_verilator / Module 4</a:t>
+            </a:r>
+          </a:p>
+        </p:txBody>
+      </p:sp>
+    </p:spTree>
+  </p:cSld>
+  <p:clrMapOvr>
+    <a:masterClrMapping/>
+  </p:clrMapOvr>
+</p:sld>
+</file>
+
+<file path=ppt/slides/slide71.xml><?xml version="1.0" encoding="utf-8"?>
+<p:sld xmlns:a="http://schemas.openxmlformats.org/drawingml/2006/main" xmlns:p="http://schemas.openxmlformats.org/presentationml/2006/main" xmlns:r="http://schemas.openxmlformats.org/officeDocument/2006/relationships">
+  <p:cSld>
+    <p:spTree>
+      <p:nvGrpSpPr>
+        <p:cNvPr id="1" name=""/>
+        <p:cNvGrpSpPr/>
+        <p:nvPr/>
+      </p:nvGrpSpPr>
+      <p:grpSpPr/>
+      <p:sp>
+        <p:nvSpPr>
+          <p:cNvPr id="2" name="TextBox 1"/>
+          <p:cNvSpPr txBox="1"/>
+          <p:nvPr/>
+        </p:nvSpPr>
+        <p:spPr>
+          <a:xfrm>
+            <a:off x="548640" y="411480"/>
+            <a:ext cx="11064240" cy="777240"/>
+          </a:xfrm>
+          <a:prstGeom prst="rect">
+            <a:avLst/>
+          </a:prstGeom>
+          <a:noFill/>
+        </p:spPr>
+        <p:txBody>
+          <a:bodyPr wrap="square">
+            <a:noAutofit/>
+          </a:bodyPr>
+          <a:lstStyle/>
+          <a:p>
+            <a:pPr>
+              <a:lnSpc>
+                <a:spcPts val="2200"/>
+              </a:lnSpc>
+              <a:defRPr sz="2800" b="1">
+                <a:solidFill>
+                  <a:srgbClr val="1A1A2E"/>
+                </a:solidFill>
+                <a:latin typeface="Calibri"/>
+              </a:defRPr>
+            </a:pPr>
+            <a:r>
+              <a:t>Demo: Sequencers</a:t>
+            </a:r>
+          </a:p>
+        </p:txBody>
+      </p:sp>
+      <p:sp>
+        <p:nvSpPr>
+          <p:cNvPr id="3" name="TextBox 2"/>
+          <p:cNvSpPr txBox="1"/>
+          <p:nvPr/>
+        </p:nvSpPr>
+        <p:spPr>
+          <a:xfrm>
+            <a:off x="548640" y="1051560"/>
+            <a:ext cx="11064240" cy="914400"/>
+          </a:xfrm>
+          <a:prstGeom prst="rect">
+            <a:avLst/>
+          </a:prstGeom>
+          <a:solidFill>
+            <a:srgbClr val="F4F4F4"/>
+          </a:solidFill>
+        </p:spPr>
+        <p:txBody>
+          <a:bodyPr wrap="square">
+            <a:noAutofit/>
+          </a:bodyPr>
+          <a:lstStyle/>
+          <a:p>
+            <a:pPr>
+              <a:lnSpc>
+                <a:spcPts val="2200"/>
+              </a:lnSpc>
+              <a:spcAft>
+                <a:spcPts val="200"/>
+              </a:spcAft>
+              <a:defRPr sz="2000" b="0">
+                <a:solidFill>
+                  <a:srgbClr val="333333"/>
+                </a:solidFill>
+                <a:latin typeface="Consolas"/>
+              </a:defRPr>
+            </a:pPr>
+            <a:r>
+              <a:t>$ ./scripts/module4.sh --sequencers</a:t>
+            </a:r>
+          </a:p>
+        </p:txBody>
+      </p:sp>
+      <p:pic>
+        <p:nvPicPr>
+          <p:cNvPr id="4" name="Picture 3" descr="ex04_sequencers.png"/>
+          <p:cNvPicPr>
+            <a:picLocks noChangeAspect="1"/>
+          </p:cNvPicPr>
+          <p:nvPr/>
+        </p:nvPicPr>
+        <p:blipFill>
+          <a:blip r:embed="rId2"/>
+          <a:stretch>
+            <a:fillRect/>
+          </a:stretch>
+        </p:blipFill>
+        <p:spPr>
+          <a:xfrm>
+            <a:off x="548640" y="1965960"/>
+            <a:ext cx="7071358" cy="3977639"/>
+          </a:xfrm>
+          <a:prstGeom prst="rect">
+            <a:avLst/>
+          </a:prstGeom>
+        </p:spPr>
+      </p:pic>
+      <p:sp>
+        <p:nvSpPr>
+          <p:cNvPr id="5" name="TextBox 4"/>
+          <p:cNvSpPr txBox="1"/>
+          <p:nvPr/>
+        </p:nvSpPr>
+        <p:spPr>
+          <a:xfrm>
+            <a:off x="548640" y="6355080"/>
+            <a:ext cx="11064240" cy="320040"/>
+          </a:xfrm>
+          <a:prstGeom prst="rect">
+            <a:avLst/>
+          </a:prstGeom>
+          <a:noFill/>
+        </p:spPr>
+        <p:txBody>
+          <a:bodyPr wrap="square">
+            <a:noAutofit/>
+          </a:bodyPr>
+          <a:lstStyle/>
+          <a:p>
+            <a:pPr algn="r">
+              <a:lnSpc>
+                <a:spcPts val="2200"/>
+              </a:lnSpc>
+              <a:defRPr sz="1000" b="0">
+                <a:solidFill>
+                  <a:srgbClr val="666666"/>
+                </a:solidFill>
+                <a:latin typeface="Calibri"/>
+              </a:defRPr>
+            </a:pPr>
+            <a:r>
+              <a:t>learn_uvm2017_sv_verilator / Module 4</a:t>
+            </a:r>
+          </a:p>
+        </p:txBody>
+      </p:sp>
+    </p:spTree>
+  </p:cSld>
+  <p:clrMapOvr>
+    <a:masterClrMapping/>
+  </p:clrMapOvr>
+</p:sld>
+</file>
+
+<file path=ppt/slides/slide72.xml><?xml version="1.0" encoding="utf-8"?>
+<p:sld xmlns:a="http://schemas.openxmlformats.org/drawingml/2006/main" xmlns:p="http://schemas.openxmlformats.org/presentationml/2006/main" xmlns:r="http://schemas.openxmlformats.org/officeDocument/2006/relationships">
+  <p:cSld>
+    <p:spTree>
+      <p:nvGrpSpPr>
+        <p:cNvPr id="1" name=""/>
+        <p:cNvGrpSpPr/>
+        <p:nvPr/>
+      </p:nvGrpSpPr>
+      <p:grpSpPr/>
+      <p:sp>
+        <p:nvSpPr>
+          <p:cNvPr id="2" name="TextBox 1"/>
+          <p:cNvSpPr txBox="1"/>
+          <p:nvPr/>
+        </p:nvSpPr>
+        <p:spPr>
+          <a:xfrm>
+            <a:off x="548640" y="411480"/>
+            <a:ext cx="11064240" cy="777240"/>
+          </a:xfrm>
+          <a:prstGeom prst="rect">
+            <a:avLst/>
+          </a:prstGeom>
+          <a:noFill/>
+        </p:spPr>
+        <p:txBody>
+          <a:bodyPr wrap="square">
+            <a:noAutofit/>
+          </a:bodyPr>
+          <a:lstStyle/>
+          <a:p>
+            <a:pPr>
+              <a:lnSpc>
+                <a:spcPts val="2200"/>
+              </a:lnSpc>
+              <a:defRPr sz="2800" b="1">
+                <a:solidFill>
+                  <a:srgbClr val="1A1A2E"/>
+                </a:solidFill>
+                <a:latin typeface="Calibri"/>
+              </a:defRPr>
+            </a:pPr>
+            <a:r>
+              <a:t>Example 5: TLM</a:t>
+            </a:r>
+          </a:p>
+        </p:txBody>
+      </p:sp>
+      <p:sp>
+        <p:nvSpPr>
+          <p:cNvPr id="3" name="TextBox 2"/>
+          <p:cNvSpPr txBox="1"/>
+          <p:nvPr/>
+        </p:nvSpPr>
+        <p:spPr>
+          <a:xfrm>
+            <a:off x="548640" y="1234440"/>
+            <a:ext cx="11064240" cy="4937760"/>
+          </a:xfrm>
+          <a:prstGeom prst="rect">
+            <a:avLst/>
+          </a:prstGeom>
+          <a:noFill/>
+        </p:spPr>
+        <p:txBody>
+          <a:bodyPr wrap="square">
+            <a:noAutofit/>
+          </a:bodyPr>
+          <a:lstStyle/>
+          <a:p>
+            <a:pPr>
+              <a:lnSpc>
+                <a:spcPts val="2200"/>
+              </a:lnSpc>
+              <a:spcAft>
+                <a:spcPts val="1000"/>
+              </a:spcAft>
+              <a:defRPr sz="2000" b="0">
+                <a:solidFill>
+                  <a:srgbClr val="333333"/>
+                </a:solidFill>
+                <a:latin typeface="Calibri"/>
+              </a:defRPr>
+            </a:pPr>
+            <a:r>
+              <a:t>• TlmProducer: Uses `uvm_blocking_put_port` to produce</a:t>
+            </a:r>
+          </a:p>
+          <a:p>
+            <a:pPr>
+              <a:lnSpc>
+                <a:spcPts val="2200"/>
+              </a:lnSpc>
+              <a:spcAft>
+                <a:spcPts val="1000"/>
+              </a:spcAft>
+              <a:defRPr sz="2000" b="0">
+                <a:solidFill>
+                  <a:srgbClr val="333333"/>
+                </a:solidFill>
+                <a:latin typeface="Calibri"/>
+              </a:defRPr>
+            </a:pPr>
+            <a:r>
+              <a:t>      transactions</a:t>
+            </a:r>
+          </a:p>
+          <a:p>
+            <a:pPr>
+              <a:lnSpc>
+                <a:spcPts val="2200"/>
+              </a:lnSpc>
+              <a:spcAft>
+                <a:spcPts val="1000"/>
+              </a:spcAft>
+              <a:defRPr sz="2000" b="0">
+                <a:solidFill>
+                  <a:srgbClr val="333333"/>
+                </a:solidFill>
+                <a:latin typeface="Calibri"/>
+              </a:defRPr>
+            </a:pPr>
+            <a:r>
+              <a:t>• TlmConsumer: Uses `uvm_blocking_get_export` to</a:t>
+            </a:r>
+          </a:p>
+          <a:p>
+            <a:pPr>
+              <a:lnSpc>
+                <a:spcPts val="2200"/>
+              </a:lnSpc>
+              <a:spcAft>
+                <a:spcPts val="1000"/>
+              </a:spcAft>
+              <a:defRPr sz="2000" b="0">
+                <a:solidFill>
+                  <a:srgbClr val="333333"/>
+                </a:solidFill>
+                <a:latin typeface="Calibri"/>
+              </a:defRPr>
+            </a:pPr>
+            <a:r>
+              <a:t>      consume transactions</a:t>
+            </a:r>
+          </a:p>
+          <a:p>
+            <a:pPr>
+              <a:lnSpc>
+                <a:spcPts val="2200"/>
+              </a:lnSpc>
+              <a:spcAft>
+                <a:spcPts val="1000"/>
+              </a:spcAft>
+              <a:defRPr sz="2000" b="0">
+                <a:solidFill>
+                  <a:srgbClr val="333333"/>
+                </a:solidFill>
+                <a:latin typeface="Calibri"/>
+              </a:defRPr>
+            </a:pPr>
+            <a:r>
+              <a:t>• AnalysisProducer: Uses `uvm_analysis_port` to</a:t>
+            </a:r>
+          </a:p>
+          <a:p>
+            <a:pPr>
+              <a:lnSpc>
+                <a:spcPts val="2200"/>
+              </a:lnSpc>
+              <a:spcAft>
+                <a:spcPts val="1000"/>
+              </a:spcAft>
+              <a:defRPr sz="2000" b="0">
+                <a:solidFill>
+                  <a:srgbClr val="333333"/>
+                </a:solidFill>
+                <a:latin typeface="Calibri"/>
+              </a:defRPr>
+            </a:pPr>
+            <a:r>
+              <a:t>      broadcast transactions</a:t>
+            </a:r>
+          </a:p>
+        </p:txBody>
+      </p:sp>
+      <p:sp>
+        <p:nvSpPr>
+          <p:cNvPr id="4" name="TextBox 3"/>
+          <p:cNvSpPr txBox="1"/>
+          <p:nvPr/>
+        </p:nvSpPr>
+        <p:spPr>
+          <a:xfrm>
+            <a:off x="548640" y="6355080"/>
+            <a:ext cx="11064240" cy="320040"/>
+          </a:xfrm>
+          <a:prstGeom prst="rect">
+            <a:avLst/>
+          </a:prstGeom>
+          <a:noFill/>
+        </p:spPr>
+        <p:txBody>
+          <a:bodyPr wrap="square">
+            <a:noAutofit/>
+          </a:bodyPr>
+          <a:lstStyle/>
+          <a:p>
+            <a:pPr algn="r">
+              <a:lnSpc>
+                <a:spcPts val="2200"/>
+              </a:lnSpc>
+              <a:defRPr sz="1000" b="0">
+                <a:solidFill>
+                  <a:srgbClr val="666666"/>
+                </a:solidFill>
+                <a:latin typeface="Calibri"/>
+              </a:defRPr>
+            </a:pPr>
+            <a:r>
+              <a:t>learn_uvm2017_sv_verilator / Module 4</a:t>
+            </a:r>
+          </a:p>
+        </p:txBody>
+      </p:sp>
+    </p:spTree>
+  </p:cSld>
+  <p:clrMapOvr>
+    <a:masterClrMapping/>
+  </p:clrMapOvr>
+</p:sld>
+</file>
+
+<file path=ppt/slides/slide73.xml><?xml version="1.0" encoding="utf-8"?>
+<p:sld xmlns:a="http://schemas.openxmlformats.org/drawingml/2006/main" xmlns:p="http://schemas.openxmlformats.org/presentationml/2006/main" xmlns:r="http://schemas.openxmlformats.org/officeDocument/2006/relationships">
+  <p:cSld>
+    <p:spTree>
+      <p:nvGrpSpPr>
+        <p:cNvPr id="1" name=""/>
+        <p:cNvGrpSpPr/>
+        <p:nvPr/>
+      </p:nvGrpSpPr>
+      <p:grpSpPr/>
+      <p:sp>
+        <p:nvSpPr>
+          <p:cNvPr id="2" name="TextBox 1"/>
+          <p:cNvSpPr txBox="1"/>
+          <p:nvPr/>
+        </p:nvSpPr>
+        <p:spPr>
+          <a:xfrm>
+            <a:off x="548640" y="411480"/>
+            <a:ext cx="11064240" cy="777240"/>
+          </a:xfrm>
+          <a:prstGeom prst="rect">
+            <a:avLst/>
+          </a:prstGeom>
+          <a:noFill/>
+        </p:spPr>
+        <p:txBody>
+          <a:bodyPr wrap="square">
+            <a:noAutofit/>
+          </a:bodyPr>
+          <a:lstStyle/>
+          <a:p>
+            <a:pPr>
+              <a:lnSpc>
+                <a:spcPts val="2200"/>
+              </a:lnSpc>
+              <a:defRPr sz="2800" b="1">
+                <a:solidFill>
+                  <a:srgbClr val="1A1A2E"/>
+                </a:solidFill>
+                <a:latin typeface="Calibri"/>
+              </a:defRPr>
+            </a:pPr>
+            <a:r>
+              <a:t>Demo: TLM</a:t>
+            </a:r>
+          </a:p>
+        </p:txBody>
+      </p:sp>
+      <p:sp>
+        <p:nvSpPr>
+          <p:cNvPr id="3" name="TextBox 2"/>
+          <p:cNvSpPr txBox="1"/>
+          <p:nvPr/>
+        </p:nvSpPr>
+        <p:spPr>
+          <a:xfrm>
+            <a:off x="548640" y="1051560"/>
+            <a:ext cx="11064240" cy="914400"/>
+          </a:xfrm>
+          <a:prstGeom prst="rect">
+            <a:avLst/>
+          </a:prstGeom>
+          <a:solidFill>
+            <a:srgbClr val="F4F4F4"/>
+          </a:solidFill>
+        </p:spPr>
+        <p:txBody>
+          <a:bodyPr wrap="square">
+            <a:noAutofit/>
+          </a:bodyPr>
+          <a:lstStyle/>
+          <a:p>
+            <a:pPr>
+              <a:lnSpc>
+                <a:spcPts val="2200"/>
+              </a:lnSpc>
+              <a:spcAft>
+                <a:spcPts val="200"/>
+              </a:spcAft>
+              <a:defRPr sz="2000" b="0">
+                <a:solidFill>
+                  <a:srgbClr val="333333"/>
+                </a:solidFill>
+                <a:latin typeface="Consolas"/>
+              </a:defRPr>
+            </a:pPr>
+            <a:r>
+              <a:t>$ ./scripts/module4.sh --tlm</a:t>
+            </a:r>
+          </a:p>
+        </p:txBody>
+      </p:sp>
+      <p:pic>
+        <p:nvPicPr>
+          <p:cNvPr id="4" name="Picture 3" descr="ex05_tlm.png"/>
+          <p:cNvPicPr>
+            <a:picLocks noChangeAspect="1"/>
+          </p:cNvPicPr>
+          <p:nvPr/>
+        </p:nvPicPr>
+        <p:blipFill>
+          <a:blip r:embed="rId2"/>
+          <a:stretch>
+            <a:fillRect/>
+          </a:stretch>
+        </p:blipFill>
+        <p:spPr>
+          <a:xfrm>
+            <a:off x="548640" y="1965960"/>
+            <a:ext cx="7071358" cy="3977639"/>
+          </a:xfrm>
+          <a:prstGeom prst="rect">
+            <a:avLst/>
+          </a:prstGeom>
+        </p:spPr>
+      </p:pic>
+      <p:sp>
+        <p:nvSpPr>
+          <p:cNvPr id="5" name="TextBox 4"/>
+          <p:cNvSpPr txBox="1"/>
+          <p:nvPr/>
+        </p:nvSpPr>
+        <p:spPr>
+          <a:xfrm>
+            <a:off x="548640" y="6355080"/>
+            <a:ext cx="11064240" cy="320040"/>
+          </a:xfrm>
+          <a:prstGeom prst="rect">
+            <a:avLst/>
+          </a:prstGeom>
+          <a:noFill/>
+        </p:spPr>
+        <p:txBody>
+          <a:bodyPr wrap="square">
+            <a:noAutofit/>
+          </a:bodyPr>
+          <a:lstStyle/>
+          <a:p>
+            <a:pPr algn="r">
+              <a:lnSpc>
+                <a:spcPts val="2200"/>
+              </a:lnSpc>
+              <a:defRPr sz="1000" b="0">
+                <a:solidFill>
+                  <a:srgbClr val="666666"/>
+                </a:solidFill>
+                <a:latin typeface="Calibri"/>
+              </a:defRPr>
+            </a:pPr>
+            <a:r>
+              <a:t>learn_uvm2017_sv_verilator / Module 4</a:t>
+            </a:r>
+          </a:p>
+        </p:txBody>
+      </p:sp>
+    </p:spTree>
+  </p:cSld>
+  <p:clrMapOvr>
+    <a:masterClrMapping/>
+  </p:clrMapOvr>
+</p:sld>
+</file>
+
+<file path=ppt/slides/slide74.xml><?xml version="1.0" encoding="utf-8"?>
+<p:sld xmlns:a="http://schemas.openxmlformats.org/drawingml/2006/main" xmlns:p="http://schemas.openxmlformats.org/presentationml/2006/main" xmlns:r="http://schemas.openxmlformats.org/officeDocument/2006/relationships">
+  <p:cSld>
+    <p:spTree>
+      <p:nvGrpSpPr>
+        <p:cNvPr id="1" name=""/>
+        <p:cNvGrpSpPr/>
+        <p:nvPr/>
+      </p:nvGrpSpPr>
+      <p:grpSpPr/>
+      <p:sp>
+        <p:nvSpPr>
+          <p:cNvPr id="2" name="TextBox 1"/>
+          <p:cNvSpPr txBox="1"/>
+          <p:nvPr/>
+        </p:nvSpPr>
+        <p:spPr>
+          <a:xfrm>
+            <a:off x="548640" y="411480"/>
+            <a:ext cx="11064240" cy="777240"/>
+          </a:xfrm>
+          <a:prstGeom prst="rect">
+            <a:avLst/>
+          </a:prstGeom>
+          <a:noFill/>
+        </p:spPr>
+        <p:txBody>
+          <a:bodyPr wrap="square">
+            <a:noAutofit/>
+          </a:bodyPr>
+          <a:lstStyle/>
+          <a:p>
+            <a:pPr>
+              <a:lnSpc>
+                <a:spcPts val="2200"/>
+              </a:lnSpc>
+              <a:defRPr sz="2800" b="1">
+                <a:solidFill>
+                  <a:srgbClr val="1A1A2E"/>
+                </a:solidFill>
+                <a:latin typeface="Calibri"/>
+              </a:defRPr>
+            </a:pPr>
+            <a:r>
+              <a:t>Example 6: Scoreboards</a:t>
+            </a:r>
+          </a:p>
+        </p:txBody>
+      </p:sp>
+      <p:sp>
+        <p:nvSpPr>
+          <p:cNvPr id="3" name="TextBox 2"/>
+          <p:cNvSpPr txBox="1"/>
+          <p:nvPr/>
+        </p:nvSpPr>
+        <p:spPr>
+          <a:xfrm>
+            <a:off x="548640" y="1234440"/>
+            <a:ext cx="11064240" cy="4937760"/>
+          </a:xfrm>
+          <a:prstGeom prst="rect">
+            <a:avLst/>
+          </a:prstGeom>
+          <a:noFill/>
+        </p:spPr>
+        <p:txBody>
+          <a:bodyPr wrap="square">
+            <a:noAutofit/>
+          </a:bodyPr>
+          <a:lstStyle/>
+          <a:p>
+            <a:pPr>
+              <a:lnSpc>
+                <a:spcPts val="2200"/>
+              </a:lnSpc>
+              <a:spcAft>
+                <a:spcPts val="1000"/>
+              </a:spcAft>
+              <a:defRPr sz="2000" b="0">
+                <a:solidFill>
+                  <a:srgbClr val="333333"/>
+                </a:solidFill>
+                <a:latin typeface="Calibri"/>
+              </a:defRPr>
+            </a:pPr>
+            <a:r>
+              <a:t>• SimpleScoreboard: Basic scoreboard with transaction</a:t>
+            </a:r>
+          </a:p>
+          <a:p>
+            <a:pPr>
+              <a:lnSpc>
+                <a:spcPts val="2200"/>
+              </a:lnSpc>
+              <a:spcAft>
+                <a:spcPts val="1000"/>
+              </a:spcAft>
+              <a:defRPr sz="2000" b="0">
+                <a:solidFill>
+                  <a:srgbClr val="333333"/>
+                </a:solidFill>
+                <a:latin typeface="Calibri"/>
+              </a:defRPr>
+            </a:pPr>
+            <a:r>
+              <a:t>      comparison</a:t>
+            </a:r>
+          </a:p>
+          <a:p>
+            <a:pPr>
+              <a:lnSpc>
+                <a:spcPts val="2200"/>
+              </a:lnSpc>
+              <a:spcAft>
+                <a:spcPts val="1000"/>
+              </a:spcAft>
+              <a:defRPr sz="2000" b="0">
+                <a:solidFill>
+                  <a:srgbClr val="333333"/>
+                </a:solidFill>
+                <a:latin typeface="Calibri"/>
+              </a:defRPr>
+            </a:pPr>
+            <a:r>
+              <a:t>• Transaction Storage: Storing expected and actual</a:t>
+            </a:r>
+          </a:p>
+          <a:p>
+            <a:pPr>
+              <a:lnSpc>
+                <a:spcPts val="2200"/>
+              </a:lnSpc>
+              <a:spcAft>
+                <a:spcPts val="1000"/>
+              </a:spcAft>
+              <a:defRPr sz="2000" b="0">
+                <a:solidFill>
+                  <a:srgbClr val="333333"/>
+                </a:solidFill>
+                <a:latin typeface="Calibri"/>
+              </a:defRPr>
+            </a:pPr>
+            <a:r>
+              <a:t>      transactions</a:t>
+            </a:r>
+          </a:p>
+          <a:p>
+            <a:pPr>
+              <a:lnSpc>
+                <a:spcPts val="2200"/>
+              </a:lnSpc>
+              <a:spcAft>
+                <a:spcPts val="1000"/>
+              </a:spcAft>
+              <a:defRPr sz="2000" b="0">
+                <a:solidFill>
+                  <a:srgbClr val="333333"/>
+                </a:solidFill>
+                <a:latin typeface="Calibri"/>
+              </a:defRPr>
+            </a:pPr>
+            <a:r>
+              <a:t>• Comparison Logic: Comparing transactions for</a:t>
+            </a:r>
+          </a:p>
+          <a:p>
+            <a:pPr>
+              <a:lnSpc>
+                <a:spcPts val="2200"/>
+              </a:lnSpc>
+              <a:spcAft>
+                <a:spcPts val="1000"/>
+              </a:spcAft>
+              <a:defRPr sz="2000" b="0">
+                <a:solidFill>
+                  <a:srgbClr val="333333"/>
+                </a:solidFill>
+                <a:latin typeface="Calibri"/>
+              </a:defRPr>
+            </a:pPr>
+            <a:r>
+              <a:t>      verification</a:t>
+            </a:r>
+          </a:p>
+        </p:txBody>
+      </p:sp>
+      <p:sp>
+        <p:nvSpPr>
+          <p:cNvPr id="4" name="TextBox 3"/>
+          <p:cNvSpPr txBox="1"/>
+          <p:nvPr/>
+        </p:nvSpPr>
+        <p:spPr>
+          <a:xfrm>
+            <a:off x="548640" y="6355080"/>
+            <a:ext cx="11064240" cy="320040"/>
+          </a:xfrm>
+          <a:prstGeom prst="rect">
+            <a:avLst/>
+          </a:prstGeom>
+          <a:noFill/>
+        </p:spPr>
+        <p:txBody>
+          <a:bodyPr wrap="square">
+            <a:noAutofit/>
+          </a:bodyPr>
+          <a:lstStyle/>
+          <a:p>
+            <a:pPr algn="r">
+              <a:lnSpc>
+                <a:spcPts val="2200"/>
+              </a:lnSpc>
+              <a:defRPr sz="1000" b="0">
+                <a:solidFill>
+                  <a:srgbClr val="666666"/>
+                </a:solidFill>
+                <a:latin typeface="Calibri"/>
+              </a:defRPr>
+            </a:pPr>
+            <a:r>
+              <a:t>learn_uvm2017_sv_verilator / Module 4</a:t>
+            </a:r>
+          </a:p>
+        </p:txBody>
+      </p:sp>
+    </p:spTree>
+  </p:cSld>
+  <p:clrMapOvr>
+    <a:masterClrMapping/>
+  </p:clrMapOvr>
+</p:sld>
+</file>
+
+<file path=ppt/slides/slide75.xml><?xml version="1.0" encoding="utf-8"?>
+<p:sld xmlns:a="http://schemas.openxmlformats.org/drawingml/2006/main" xmlns:p="http://schemas.openxmlformats.org/presentationml/2006/main" xmlns:r="http://schemas.openxmlformats.org/officeDocument/2006/relationships">
+  <p:cSld>
+    <p:spTree>
+      <p:nvGrpSpPr>
+        <p:cNvPr id="1" name=""/>
+        <p:cNvGrpSpPr/>
+        <p:nvPr/>
+      </p:nvGrpSpPr>
+      <p:grpSpPr/>
+      <p:sp>
+        <p:nvSpPr>
+          <p:cNvPr id="2" name="TextBox 1"/>
+          <p:cNvSpPr txBox="1"/>
+          <p:nvPr/>
+        </p:nvSpPr>
+        <p:spPr>
+          <a:xfrm>
+            <a:off x="548640" y="411480"/>
+            <a:ext cx="11064240" cy="777240"/>
+          </a:xfrm>
+          <a:prstGeom prst="rect">
+            <a:avLst/>
+          </a:prstGeom>
+          <a:noFill/>
+        </p:spPr>
+        <p:txBody>
+          <a:bodyPr wrap="square">
+            <a:noAutofit/>
+          </a:bodyPr>
+          <a:lstStyle/>
+          <a:p>
+            <a:pPr>
+              <a:lnSpc>
+                <a:spcPts val="2200"/>
+              </a:lnSpc>
+              <a:defRPr sz="2800" b="1">
+                <a:solidFill>
+                  <a:srgbClr val="1A1A2E"/>
+                </a:solidFill>
+                <a:latin typeface="Calibri"/>
+              </a:defRPr>
+            </a:pPr>
+            <a:r>
+              <a:t>Demo: Scoreboards</a:t>
+            </a:r>
+          </a:p>
+        </p:txBody>
+      </p:sp>
+      <p:sp>
+        <p:nvSpPr>
+          <p:cNvPr id="3" name="TextBox 2"/>
+          <p:cNvSpPr txBox="1"/>
+          <p:nvPr/>
+        </p:nvSpPr>
+        <p:spPr>
+          <a:xfrm>
+            <a:off x="548640" y="1051560"/>
+            <a:ext cx="11064240" cy="914400"/>
+          </a:xfrm>
+          <a:prstGeom prst="rect">
+            <a:avLst/>
+          </a:prstGeom>
+          <a:solidFill>
+            <a:srgbClr val="F4F4F4"/>
+          </a:solidFill>
+        </p:spPr>
+        <p:txBody>
+          <a:bodyPr wrap="square">
+            <a:noAutofit/>
+          </a:bodyPr>
+          <a:lstStyle/>
+          <a:p>
+            <a:pPr>
+              <a:lnSpc>
+                <a:spcPts val="2200"/>
+              </a:lnSpc>
+              <a:spcAft>
+                <a:spcPts val="200"/>
+              </a:spcAft>
+              <a:defRPr sz="2000" b="0">
+                <a:solidFill>
+                  <a:srgbClr val="333333"/>
+                </a:solidFill>
+                <a:latin typeface="Consolas"/>
+              </a:defRPr>
+            </a:pPr>
+            <a:r>
+              <a:t>$ ./scripts/module4.sh --scoreboards</a:t>
+            </a:r>
+          </a:p>
+        </p:txBody>
+      </p:sp>
+      <p:pic>
+        <p:nvPicPr>
+          <p:cNvPr id="4" name="Picture 3" descr="ex06_scoreboards.png"/>
+          <p:cNvPicPr>
+            <a:picLocks noChangeAspect="1"/>
+          </p:cNvPicPr>
+          <p:nvPr/>
+        </p:nvPicPr>
+        <p:blipFill>
+          <a:blip r:embed="rId2"/>
+          <a:stretch>
+            <a:fillRect/>
+          </a:stretch>
+        </p:blipFill>
+        <p:spPr>
+          <a:xfrm>
+            <a:off x="548640" y="1965960"/>
+            <a:ext cx="7071358" cy="3977639"/>
+          </a:xfrm>
+          <a:prstGeom prst="rect">
+            <a:avLst/>
+          </a:prstGeom>
+        </p:spPr>
+      </p:pic>
+      <p:sp>
+        <p:nvSpPr>
+          <p:cNvPr id="5" name="TextBox 4"/>
+          <p:cNvSpPr txBox="1"/>
+          <p:nvPr/>
+        </p:nvSpPr>
+        <p:spPr>
+          <a:xfrm>
+            <a:off x="548640" y="6355080"/>
+            <a:ext cx="11064240" cy="320040"/>
+          </a:xfrm>
+          <a:prstGeom prst="rect">
+            <a:avLst/>
+          </a:prstGeom>
+          <a:noFill/>
+        </p:spPr>
+        <p:txBody>
+          <a:bodyPr wrap="square">
+            <a:noAutofit/>
+          </a:bodyPr>
+          <a:lstStyle/>
+          <a:p>
+            <a:pPr algn="r">
+              <a:lnSpc>
+                <a:spcPts val="2200"/>
+              </a:lnSpc>
+              <a:defRPr sz="1000" b="0">
+                <a:solidFill>
+                  <a:srgbClr val="666666"/>
+                </a:solidFill>
+                <a:latin typeface="Calibri"/>
+              </a:defRPr>
+            </a:pPr>
+            <a:r>
+              <a:t>learn_uvm2017_sv_verilator / Module 4</a:t>
+            </a:r>
+          </a:p>
+        </p:txBody>
+      </p:sp>
+    </p:spTree>
+  </p:cSld>
+  <p:clrMapOvr>
+    <a:masterClrMapping/>
+  </p:clrMapOvr>
+</p:sld>
+</file>
+
+<file path=ppt/slides/slide76.xml><?xml version="1.0" encoding="utf-8"?>
+<p:sld xmlns:a="http://schemas.openxmlformats.org/drawingml/2006/main" xmlns:p="http://schemas.openxmlformats.org/presentationml/2006/main" xmlns:r="http://schemas.openxmlformats.org/officeDocument/2006/relationships">
+  <p:cSld>
+    <p:spTree>
+      <p:nvGrpSpPr>
+        <p:cNvPr id="1" name=""/>
+        <p:cNvGrpSpPr/>
+        <p:nvPr/>
+      </p:nvGrpSpPr>
+      <p:grpSpPr/>
+      <p:sp>
+        <p:nvSpPr>
+          <p:cNvPr id="2" name="TextBox 1"/>
+          <p:cNvSpPr txBox="1"/>
+          <p:nvPr/>
+        </p:nvSpPr>
+        <p:spPr>
+          <a:xfrm>
+            <a:off x="548640" y="411480"/>
+            <a:ext cx="11064240" cy="777240"/>
+          </a:xfrm>
+          <a:prstGeom prst="rect">
+            <a:avLst/>
+          </a:prstGeom>
+          <a:noFill/>
+        </p:spPr>
+        <p:txBody>
+          <a:bodyPr wrap="square">
+            <a:noAutofit/>
+          </a:bodyPr>
+          <a:lstStyle/>
+          <a:p>
+            <a:pPr>
+              <a:lnSpc>
+                <a:spcPts val="2200"/>
+              </a:lnSpc>
+              <a:defRPr sz="2800" b="1">
+                <a:solidFill>
+                  <a:srgbClr val="1A1A2E"/>
+                </a:solidFill>
+                <a:latin typeface="Calibri"/>
+              </a:defRPr>
+            </a:pPr>
+            <a:r>
+              <a:t>Example 7: Complete Agents</a:t>
+            </a:r>
+          </a:p>
+        </p:txBody>
+      </p:sp>
+      <p:sp>
+        <p:nvSpPr>
+          <p:cNvPr id="3" name="TextBox 2"/>
+          <p:cNvSpPr txBox="1"/>
+          <p:nvPr/>
+        </p:nvSpPr>
+        <p:spPr>
+          <a:xfrm>
+            <a:off x="548640" y="1234440"/>
+            <a:ext cx="11064240" cy="4937760"/>
+          </a:xfrm>
+          <a:prstGeom prst="rect">
+            <a:avLst/>
+          </a:prstGeom>
+          <a:noFill/>
+        </p:spPr>
+        <p:txBody>
+          <a:bodyPr wrap="square">
+            <a:noAutofit/>
+          </a:bodyPr>
+          <a:lstStyle/>
+          <a:p>
+            <a:pPr>
+              <a:lnSpc>
+                <a:spcPts val="2200"/>
+              </a:lnSpc>
+              <a:spcAft>
+                <a:spcPts val="1000"/>
+              </a:spcAft>
+              <a:defRPr sz="2000" b="0">
+                <a:solidFill>
+                  <a:srgbClr val="333333"/>
+                </a:solidFill>
+                <a:latin typeface="Calibri"/>
+              </a:defRPr>
+            </a:pPr>
+            <a:r>
+              <a:t>• CompleteAgent: Contains driver, monitor, and</a:t>
+            </a:r>
+          </a:p>
+          <a:p>
+            <a:pPr>
+              <a:lnSpc>
+                <a:spcPts val="2200"/>
+              </a:lnSpc>
+              <a:spcAft>
+                <a:spcPts val="1000"/>
+              </a:spcAft>
+              <a:defRPr sz="2000" b="0">
+                <a:solidFill>
+                  <a:srgbClr val="333333"/>
+                </a:solidFill>
+                <a:latin typeface="Calibri"/>
+              </a:defRPr>
+            </a:pPr>
+            <a:r>
+              <a:t>      sequencer</a:t>
+            </a:r>
+          </a:p>
+          <a:p>
+            <a:pPr>
+              <a:lnSpc>
+                <a:spcPts val="2200"/>
+              </a:lnSpc>
+              <a:spcAft>
+                <a:spcPts val="1000"/>
+              </a:spcAft>
+              <a:defRPr sz="2000" b="0">
+                <a:solidFill>
+                  <a:srgbClr val="333333"/>
+                </a:solidFill>
+                <a:latin typeface="Calibri"/>
+              </a:defRPr>
+            </a:pPr>
+            <a:r>
+              <a:t>• Agent Configuration: Configurable as active or</a:t>
+            </a:r>
+          </a:p>
+          <a:p>
+            <a:pPr>
+              <a:lnSpc>
+                <a:spcPts val="2200"/>
+              </a:lnSpc>
+              <a:spcAft>
+                <a:spcPts val="1000"/>
+              </a:spcAft>
+              <a:defRPr sz="2000" b="0">
+                <a:solidFill>
+                  <a:srgbClr val="333333"/>
+                </a:solidFill>
+                <a:latin typeface="Calibri"/>
+              </a:defRPr>
+            </a:pPr>
+            <a:r>
+              <a:t>      passive</a:t>
+            </a:r>
+          </a:p>
+          <a:p>
+            <a:pPr>
+              <a:lnSpc>
+                <a:spcPts val="2200"/>
+              </a:lnSpc>
+              <a:spcAft>
+                <a:spcPts val="1000"/>
+              </a:spcAft>
+              <a:defRPr sz="2000" b="0">
+                <a:solidFill>
+                  <a:srgbClr val="333333"/>
+                </a:solidFill>
+                <a:latin typeface="Calibri"/>
+              </a:defRPr>
+            </a:pPr>
+            <a:r>
+              <a:t>• Component Integration: Integrating all agent</a:t>
+            </a:r>
+          </a:p>
+          <a:p>
+            <a:pPr>
+              <a:lnSpc>
+                <a:spcPts val="2200"/>
+              </a:lnSpc>
+              <a:spcAft>
+                <a:spcPts val="1000"/>
+              </a:spcAft>
+              <a:defRPr sz="2000" b="0">
+                <a:solidFill>
+                  <a:srgbClr val="333333"/>
+                </a:solidFill>
+                <a:latin typeface="Calibri"/>
+              </a:defRPr>
+            </a:pPr>
+            <a:r>
+              <a:t>      components</a:t>
+            </a:r>
+          </a:p>
+        </p:txBody>
+      </p:sp>
+      <p:sp>
+        <p:nvSpPr>
+          <p:cNvPr id="4" name="TextBox 3"/>
+          <p:cNvSpPr txBox="1"/>
+          <p:nvPr/>
+        </p:nvSpPr>
+        <p:spPr>
+          <a:xfrm>
+            <a:off x="548640" y="6355080"/>
+            <a:ext cx="11064240" cy="320040"/>
+          </a:xfrm>
+          <a:prstGeom prst="rect">
+            <a:avLst/>
+          </a:prstGeom>
+          <a:noFill/>
+        </p:spPr>
+        <p:txBody>
+          <a:bodyPr wrap="square">
+            <a:noAutofit/>
+          </a:bodyPr>
+          <a:lstStyle/>
+          <a:p>
+            <a:pPr algn="r">
+              <a:lnSpc>
+                <a:spcPts val="2200"/>
+              </a:lnSpc>
+              <a:defRPr sz="1000" b="0">
+                <a:solidFill>
+                  <a:srgbClr val="666666"/>
+                </a:solidFill>
+                <a:latin typeface="Calibri"/>
+              </a:defRPr>
+            </a:pPr>
+            <a:r>
+              <a:t>learn_uvm2017_sv_verilator / Module 4</a:t>
+            </a:r>
+          </a:p>
+        </p:txBody>
+      </p:sp>
+    </p:spTree>
+  </p:cSld>
+  <p:clrMapOvr>
+    <a:masterClrMapping/>
+  </p:clrMapOvr>
+</p:sld>
+</file>
+
+<file path=ppt/slides/slide77.xml><?xml version="1.0" encoding="utf-8"?>
+<p:sld xmlns:a="http://schemas.openxmlformats.org/drawingml/2006/main" xmlns:p="http://schemas.openxmlformats.org/presentationml/2006/main" xmlns:r="http://schemas.openxmlformats.org/officeDocument/2006/relationships">
+  <p:cSld>
+    <p:spTree>
+      <p:nvGrpSpPr>
+        <p:cNvPr id="1" name=""/>
+        <p:cNvGrpSpPr/>
+        <p:nvPr/>
+      </p:nvGrpSpPr>
+      <p:grpSpPr/>
+      <p:sp>
+        <p:nvSpPr>
+          <p:cNvPr id="2" name="TextBox 1"/>
+          <p:cNvSpPr txBox="1"/>
+          <p:nvPr/>
+        </p:nvSpPr>
+        <p:spPr>
+          <a:xfrm>
+            <a:off x="548640" y="411480"/>
+            <a:ext cx="11064240" cy="777240"/>
+          </a:xfrm>
+          <a:prstGeom prst="rect">
+            <a:avLst/>
+          </a:prstGeom>
+          <a:noFill/>
+        </p:spPr>
+        <p:txBody>
+          <a:bodyPr wrap="square">
+            <a:noAutofit/>
+          </a:bodyPr>
+          <a:lstStyle/>
+          <a:p>
+            <a:pPr>
+              <a:lnSpc>
+                <a:spcPts val="2200"/>
+              </a:lnSpc>
+              <a:defRPr sz="2800" b="1">
+                <a:solidFill>
+                  <a:srgbClr val="1A1A2E"/>
+                </a:solidFill>
+                <a:latin typeface="Calibri"/>
+              </a:defRPr>
+            </a:pPr>
+            <a:r>
+              <a:t>Demo: Complete Agents</a:t>
+            </a:r>
+          </a:p>
+        </p:txBody>
+      </p:sp>
+      <p:sp>
+        <p:nvSpPr>
+          <p:cNvPr id="3" name="TextBox 2"/>
+          <p:cNvSpPr txBox="1"/>
+          <p:nvPr/>
+        </p:nvSpPr>
+        <p:spPr>
+          <a:xfrm>
+            <a:off x="548640" y="1051560"/>
+            <a:ext cx="11064240" cy="914400"/>
+          </a:xfrm>
+          <a:prstGeom prst="rect">
+            <a:avLst/>
+          </a:prstGeom>
+          <a:solidFill>
+            <a:srgbClr val="F4F4F4"/>
+          </a:solidFill>
+        </p:spPr>
+        <p:txBody>
+          <a:bodyPr wrap="square">
+            <a:noAutofit/>
+          </a:bodyPr>
+          <a:lstStyle/>
+          <a:p>
+            <a:pPr>
+              <a:lnSpc>
+                <a:spcPts val="2200"/>
+              </a:lnSpc>
+              <a:spcAft>
+                <a:spcPts val="200"/>
+              </a:spcAft>
+              <a:defRPr sz="2000" b="0">
+                <a:solidFill>
+                  <a:srgbClr val="333333"/>
+                </a:solidFill>
+                <a:latin typeface="Consolas"/>
+              </a:defRPr>
+            </a:pPr>
+            <a:r>
+              <a:t>$ ./scripts/module4.sh --agents</a:t>
+            </a:r>
+          </a:p>
+        </p:txBody>
+      </p:sp>
+      <p:pic>
+        <p:nvPicPr>
+          <p:cNvPr id="4" name="Picture 3" descr="ex07_agents.png"/>
+          <p:cNvPicPr>
+            <a:picLocks noChangeAspect="1"/>
+          </p:cNvPicPr>
+          <p:nvPr/>
+        </p:nvPicPr>
+        <p:blipFill>
+          <a:blip r:embed="rId2"/>
+          <a:stretch>
+            <a:fillRect/>
+          </a:stretch>
+        </p:blipFill>
+        <p:spPr>
+          <a:xfrm>
+            <a:off x="548640" y="1965960"/>
+            <a:ext cx="7071358" cy="3977639"/>
+          </a:xfrm>
+          <a:prstGeom prst="rect">
+            <a:avLst/>
+          </a:prstGeom>
+        </p:spPr>
+      </p:pic>
+      <p:sp>
+        <p:nvSpPr>
+          <p:cNvPr id="5" name="TextBox 4"/>
+          <p:cNvSpPr txBox="1"/>
+          <p:nvPr/>
+        </p:nvSpPr>
+        <p:spPr>
+          <a:xfrm>
+            <a:off x="548640" y="6355080"/>
+            <a:ext cx="11064240" cy="320040"/>
+          </a:xfrm>
+          <a:prstGeom prst="rect">
+            <a:avLst/>
+          </a:prstGeom>
+          <a:noFill/>
+        </p:spPr>
+        <p:txBody>
+          <a:bodyPr wrap="square">
+            <a:noAutofit/>
+          </a:bodyPr>
+          <a:lstStyle/>
+          <a:p>
+            <a:pPr algn="r">
+              <a:lnSpc>
+                <a:spcPts val="2200"/>
+              </a:lnSpc>
+              <a:defRPr sz="1000" b="0">
+                <a:solidFill>
+                  <a:srgbClr val="666666"/>
+                </a:solidFill>
+                <a:latin typeface="Calibri"/>
+              </a:defRPr>
+            </a:pPr>
+            <a:r>
+              <a:t>learn_uvm2017_sv_verilator / Module 4</a:t>
+            </a:r>
+          </a:p>
+        </p:txBody>
+      </p:sp>
+    </p:spTree>
+  </p:cSld>
+  <p:clrMapOvr>
+    <a:masterClrMapping/>
+  </p:clrMapOvr>
+</p:sld>
+</file>
+
+<file path=ppt/slides/slide78.xml><?xml version="1.0" encoding="utf-8"?>
+<p:sld xmlns:a="http://schemas.openxmlformats.org/drawingml/2006/main" xmlns:p="http://schemas.openxmlformats.org/presentationml/2006/main" xmlns:r="http://schemas.openxmlformats.org/officeDocument/2006/relationships">
+  <p:cSld>
+    <p:spTree>
+      <p:nvGrpSpPr>
+        <p:cNvPr id="1" name=""/>
+        <p:cNvGrpSpPr/>
+        <p:nvPr/>
+      </p:nvGrpSpPr>
+      <p:grpSpPr/>
+      <p:sp>
+        <p:nvSpPr>
+          <p:cNvPr id="2" name="TextBox 1"/>
+          <p:cNvSpPr txBox="1"/>
+          <p:nvPr/>
+        </p:nvSpPr>
+        <p:spPr>
+          <a:xfrm>
+            <a:off x="548640" y="2743200"/>
+            <a:ext cx="11064240" cy="1371600"/>
+          </a:xfrm>
+          <a:prstGeom prst="rect">
+            <a:avLst/>
+          </a:prstGeom>
+          <a:noFill/>
+        </p:spPr>
+        <p:txBody>
+          <a:bodyPr wrap="square">
+            <a:noAutofit/>
+          </a:bodyPr>
+          <a:lstStyle/>
+          <a:p>
+            <a:pPr algn="ctr">
+              <a:lnSpc>
+                <a:spcPts val="2200"/>
+              </a:lnSpc>
+              <a:defRPr sz="3600" b="1">
+                <a:solidFill>
+                  <a:srgbClr val="1A1A2E"/>
+                </a:solidFill>
+                <a:latin typeface="Calibri"/>
+              </a:defRPr>
+            </a:pPr>
+            <a:r>
+              <a:t>Practice &amp; assessment</a:t>
+            </a:r>
+          </a:p>
+        </p:txBody>
+      </p:sp>
+      <p:sp>
+        <p:nvSpPr>
+          <p:cNvPr id="3" name="TextBox 2"/>
+          <p:cNvSpPr txBox="1"/>
+          <p:nvPr/>
+        </p:nvSpPr>
+        <p:spPr>
+          <a:xfrm>
+            <a:off x="548640" y="6355080"/>
+            <a:ext cx="11064240" cy="320040"/>
+          </a:xfrm>
+          <a:prstGeom prst="rect">
+            <a:avLst/>
+          </a:prstGeom>
+          <a:noFill/>
+        </p:spPr>
+        <p:txBody>
+          <a:bodyPr wrap="square">
+            <a:noAutofit/>
+          </a:bodyPr>
+          <a:lstStyle/>
+          <a:p>
+            <a:pPr algn="r">
+              <a:lnSpc>
+                <a:spcPts val="2200"/>
+              </a:lnSpc>
+              <a:defRPr sz="1000" b="0">
+                <a:solidFill>
+                  <a:srgbClr val="666666"/>
+                </a:solidFill>
+                <a:latin typeface="Calibri"/>
+              </a:defRPr>
+            </a:pPr>
+            <a:r>
+              <a:t>learn_uvm2017_sv_verilator / Module 4</a:t>
+            </a:r>
+          </a:p>
+        </p:txBody>
+      </p:sp>
+    </p:spTree>
+  </p:cSld>
+  <p:clrMapOvr>
+    <a:masterClrMapping/>
+  </p:clrMapOvr>
+</p:sld>
+</file>
+
+<file path=ppt/slides/slide79.xml><?xml version="1.0" encoding="utf-8"?>
+<p:sld xmlns:a="http://schemas.openxmlformats.org/drawingml/2006/main" xmlns:p="http://schemas.openxmlformats.org/presentationml/2006/main" xmlns:r="http://schemas.openxmlformats.org/officeDocument/2006/relationships">
+  <p:cSld>
+    <p:spTree>
+      <p:nvGrpSpPr>
+        <p:cNvPr id="1" name=""/>
+        <p:cNvGrpSpPr/>
+        <p:nvPr/>
+      </p:nvGrpSpPr>
+      <p:grpSpPr/>
+      <p:sp>
+        <p:nvSpPr>
+          <p:cNvPr id="2" name="TextBox 1"/>
+          <p:cNvSpPr txBox="1"/>
+          <p:nvPr/>
+        </p:nvSpPr>
+        <p:spPr>
+          <a:xfrm>
+            <a:off x="548640" y="411480"/>
+            <a:ext cx="11064240" cy="777240"/>
+          </a:xfrm>
+          <a:prstGeom prst="rect">
+            <a:avLst/>
+          </a:prstGeom>
+          <a:noFill/>
+        </p:spPr>
+        <p:txBody>
+          <a:bodyPr wrap="square">
+            <a:noAutofit/>
+          </a:bodyPr>
+          <a:lstStyle/>
+          <a:p>
+            <a:pPr>
+              <a:lnSpc>
+                <a:spcPts val="2200"/>
+              </a:lnSpc>
+              <a:defRPr sz="2800" b="1">
+                <a:solidFill>
+                  <a:srgbClr val="1A1A2E"/>
+                </a:solidFill>
+                <a:latin typeface="Calibri"/>
+              </a:defRPr>
+            </a:pPr>
+            <a:r>
+              <a:t>What you should know (1/2)</a:t>
+            </a:r>
+          </a:p>
+        </p:txBody>
+      </p:sp>
+      <p:sp>
+        <p:nvSpPr>
+          <p:cNvPr id="3" name="TextBox 2"/>
+          <p:cNvSpPr txBox="1"/>
+          <p:nvPr/>
+        </p:nvSpPr>
+        <p:spPr>
+          <a:xfrm>
+            <a:off x="548640" y="1234440"/>
+            <a:ext cx="11064240" cy="4937760"/>
+          </a:xfrm>
+          <a:prstGeom prst="rect">
+            <a:avLst/>
+          </a:prstGeom>
+          <a:noFill/>
+        </p:spPr>
+        <p:txBody>
+          <a:bodyPr wrap="square">
+            <a:noAutofit/>
+          </a:bodyPr>
+          <a:lstStyle/>
+          <a:p>
+            <a:pPr>
+              <a:lnSpc>
+                <a:spcPts val="2200"/>
+              </a:lnSpc>
+              <a:spcAft>
+                <a:spcPts val="1000"/>
+              </a:spcAft>
+              <a:defRPr sz="2000" b="0">
+                <a:solidFill>
+                  <a:srgbClr val="333333"/>
+                </a:solidFill>
+                <a:latin typeface="Calibri"/>
+              </a:defRPr>
+            </a:pPr>
+            <a:r>
+              <a:t>• Design and implement transaction classes</a:t>
+            </a:r>
+          </a:p>
+          <a:p>
+            <a:pPr>
+              <a:lnSpc>
+                <a:spcPts val="2200"/>
+              </a:lnSpc>
+              <a:spcAft>
+                <a:spcPts val="1000"/>
+              </a:spcAft>
+              <a:defRPr sz="2000" b="0">
+                <a:solidFill>
+                  <a:srgbClr val="333333"/>
+                </a:solidFill>
+                <a:latin typeface="Calibri"/>
+              </a:defRPr>
+            </a:pPr>
+            <a:r>
+              <a:t>• Create drivers for DUT stimulus generation</a:t>
+            </a:r>
+          </a:p>
+          <a:p>
+            <a:pPr>
+              <a:lnSpc>
+                <a:spcPts val="2200"/>
+              </a:lnSpc>
+              <a:spcAft>
+                <a:spcPts val="1000"/>
+              </a:spcAft>
+              <a:defRPr sz="2000" b="0">
+                <a:solidFill>
+                  <a:srgbClr val="333333"/>
+                </a:solidFill>
+                <a:latin typeface="Calibri"/>
+              </a:defRPr>
+            </a:pPr>
+            <a:r>
+              <a:t>• Implement monitors for DUT observation</a:t>
+            </a:r>
+          </a:p>
+          <a:p>
+            <a:pPr>
+              <a:lnSpc>
+                <a:spcPts val="2200"/>
+              </a:lnSpc>
+              <a:spcAft>
+                <a:spcPts val="1000"/>
+              </a:spcAft>
+              <a:defRPr sz="2000" b="0">
+                <a:solidFill>
+                  <a:srgbClr val="333333"/>
+                </a:solidFill>
+                <a:latin typeface="Calibri"/>
+              </a:defRPr>
+            </a:pPr>
+            <a:r>
+              <a:t>• Build sequencers and sequences for test generation</a:t>
+            </a:r>
+          </a:p>
+          <a:p>
+            <a:pPr>
+              <a:lnSpc>
+                <a:spcPts val="2200"/>
+              </a:lnSpc>
+              <a:spcAft>
+                <a:spcPts val="1000"/>
+              </a:spcAft>
+              <a:defRPr sz="2000" b="0">
+                <a:solidFill>
+                  <a:srgbClr val="333333"/>
+                </a:solidFill>
+                <a:latin typeface="Calibri"/>
+              </a:defRPr>
+            </a:pPr>
+            <a:r>
+              <a:t>• Use TLM for component communication</a:t>
+            </a:r>
+          </a:p>
+          <a:p>
+            <a:pPr>
+              <a:lnSpc>
+                <a:spcPts val="2200"/>
+              </a:lnSpc>
+              <a:spcAft>
+                <a:spcPts val="1000"/>
+              </a:spcAft>
+              <a:defRPr sz="2000" b="0">
+                <a:solidFill>
+                  <a:srgbClr val="333333"/>
+                </a:solidFill>
+                <a:latin typeface="Calibri"/>
+              </a:defRPr>
+            </a:pPr>
+            <a:r>
+              <a:t>• Create scoreboards for result checking</a:t>
+            </a:r>
+          </a:p>
+        </p:txBody>
+      </p:sp>
+      <p:sp>
+        <p:nvSpPr>
+          <p:cNvPr id="4" name="TextBox 3"/>
+          <p:cNvSpPr txBox="1"/>
+          <p:nvPr/>
+        </p:nvSpPr>
+        <p:spPr>
+          <a:xfrm>
+            <a:off x="548640" y="6355080"/>
+            <a:ext cx="11064240" cy="320040"/>
+          </a:xfrm>
+          <a:prstGeom prst="rect">
+            <a:avLst/>
+          </a:prstGeom>
+          <a:noFill/>
+        </p:spPr>
+        <p:txBody>
+          <a:bodyPr wrap="square">
+            <a:noAutofit/>
+          </a:bodyPr>
+          <a:lstStyle/>
+          <a:p>
+            <a:pPr algn="r">
+              <a:lnSpc>
+                <a:spcPts val="2200"/>
+              </a:lnSpc>
+              <a:defRPr sz="1000" b="0">
+                <a:solidFill>
+                  <a:srgbClr val="666666"/>
+                </a:solidFill>
+                <a:latin typeface="Calibri"/>
+              </a:defRPr>
+            </a:pPr>
+            <a:r>
+              <a:t>learn_uvm2017_sv_verilator / Module 4</a:t>
+            </a:r>
+          </a:p>
+        </p:txBody>
+      </p:sp>
+    </p:spTree>
+  </p:cSld>
+  <p:clrMapOvr>
+    <a:masterClrMapping/>
+  </p:clrMapOvr>
+</p:sld>
+</file>
+
 <file path=ppt/slides/slide8.xml><?xml version="1.0" encoding="utf-8"?>
 <p:sld xmlns:a="http://schemas.openxmlformats.org/drawingml/2006/main" xmlns:p="http://schemas.openxmlformats.org/presentationml/2006/main" xmlns:r="http://schemas.openxmlformats.org/officeDocument/2006/relationships">
   <p:cSld>
@@ -22599,6 +25891,981 @@
             </a:pPr>
             <a:r>
               <a:t>      `control` and `status` fields</a:t>
+            </a:r>
+          </a:p>
+        </p:txBody>
+      </p:sp>
+      <p:sp>
+        <p:nvSpPr>
+          <p:cNvPr id="4" name="TextBox 3"/>
+          <p:cNvSpPr txBox="1"/>
+          <p:nvPr/>
+        </p:nvSpPr>
+        <p:spPr>
+          <a:xfrm>
+            <a:off x="548640" y="6355080"/>
+            <a:ext cx="11064240" cy="320040"/>
+          </a:xfrm>
+          <a:prstGeom prst="rect">
+            <a:avLst/>
+          </a:prstGeom>
+          <a:noFill/>
+        </p:spPr>
+        <p:txBody>
+          <a:bodyPr wrap="square">
+            <a:noAutofit/>
+          </a:bodyPr>
+          <a:lstStyle/>
+          <a:p>
+            <a:pPr algn="r">
+              <a:lnSpc>
+                <a:spcPts val="2200"/>
+              </a:lnSpc>
+              <a:defRPr sz="1000" b="0">
+                <a:solidFill>
+                  <a:srgbClr val="666666"/>
+                </a:solidFill>
+                <a:latin typeface="Calibri"/>
+              </a:defRPr>
+            </a:pPr>
+            <a:r>
+              <a:t>learn_uvm2017_sv_verilator / Module 4</a:t>
+            </a:r>
+          </a:p>
+        </p:txBody>
+      </p:sp>
+    </p:spTree>
+  </p:cSld>
+  <p:clrMapOvr>
+    <a:masterClrMapping/>
+  </p:clrMapOvr>
+</p:sld>
+</file>
+
+<file path=ppt/slides/slide80.xml><?xml version="1.0" encoding="utf-8"?>
+<p:sld xmlns:a="http://schemas.openxmlformats.org/drawingml/2006/main" xmlns:p="http://schemas.openxmlformats.org/presentationml/2006/main" xmlns:r="http://schemas.openxmlformats.org/officeDocument/2006/relationships">
+  <p:cSld>
+    <p:spTree>
+      <p:nvGrpSpPr>
+        <p:cNvPr id="1" name=""/>
+        <p:cNvGrpSpPr/>
+        <p:nvPr/>
+      </p:nvGrpSpPr>
+      <p:grpSpPr/>
+      <p:sp>
+        <p:nvSpPr>
+          <p:cNvPr id="2" name="TextBox 1"/>
+          <p:cNvSpPr txBox="1"/>
+          <p:nvPr/>
+        </p:nvSpPr>
+        <p:spPr>
+          <a:xfrm>
+            <a:off x="548640" y="411480"/>
+            <a:ext cx="11064240" cy="777240"/>
+          </a:xfrm>
+          <a:prstGeom prst="rect">
+            <a:avLst/>
+          </a:prstGeom>
+          <a:noFill/>
+        </p:spPr>
+        <p:txBody>
+          <a:bodyPr wrap="square">
+            <a:noAutofit/>
+          </a:bodyPr>
+          <a:lstStyle/>
+          <a:p>
+            <a:pPr>
+              <a:lnSpc>
+                <a:spcPts val="2200"/>
+              </a:lnSpc>
+              <a:defRPr sz="2800" b="1">
+                <a:solidFill>
+                  <a:srgbClr val="1A1A2E"/>
+                </a:solidFill>
+                <a:latin typeface="Calibri"/>
+              </a:defRPr>
+            </a:pPr>
+            <a:r>
+              <a:t>What you should know (2/2)</a:t>
+            </a:r>
+          </a:p>
+        </p:txBody>
+      </p:sp>
+      <p:sp>
+        <p:nvSpPr>
+          <p:cNvPr id="3" name="TextBox 2"/>
+          <p:cNvSpPr txBox="1"/>
+          <p:nvPr/>
+        </p:nvSpPr>
+        <p:spPr>
+          <a:xfrm>
+            <a:off x="548640" y="1234440"/>
+            <a:ext cx="11064240" cy="4937760"/>
+          </a:xfrm>
+          <a:prstGeom prst="rect">
+            <a:avLst/>
+          </a:prstGeom>
+          <a:noFill/>
+        </p:spPr>
+        <p:txBody>
+          <a:bodyPr wrap="square">
+            <a:noAutofit/>
+          </a:bodyPr>
+          <a:lstStyle/>
+          <a:p>
+            <a:pPr>
+              <a:lnSpc>
+                <a:spcPts val="2200"/>
+              </a:lnSpc>
+              <a:spcAft>
+                <a:spcPts val="1000"/>
+              </a:spcAft>
+              <a:defRPr sz="2000" b="0">
+                <a:solidFill>
+                  <a:srgbClr val="333333"/>
+                </a:solidFill>
+                <a:latin typeface="Calibri"/>
+              </a:defRPr>
+            </a:pPr>
+            <a:r>
+              <a:t>• Build complete agents with all components integrated</a:t>
+            </a:r>
+          </a:p>
+          <a:p>
+            <a:pPr>
+              <a:lnSpc>
+                <a:spcPts val="2200"/>
+              </a:lnSpc>
+              <a:spcAft>
+                <a:spcPts val="1000"/>
+              </a:spcAft>
+              <a:defRPr sz="2000" b="0">
+                <a:solidFill>
+                  <a:srgbClr val="333333"/>
+                </a:solidFill>
+                <a:latin typeface="Calibri"/>
+              </a:defRPr>
+            </a:pPr>
+            <a:r>
+              <a:t>• Apply UVM component patterns in testbenches</a:t>
+            </a:r>
+          </a:p>
+        </p:txBody>
+      </p:sp>
+      <p:sp>
+        <p:nvSpPr>
+          <p:cNvPr id="4" name="TextBox 3"/>
+          <p:cNvSpPr txBox="1"/>
+          <p:nvPr/>
+        </p:nvSpPr>
+        <p:spPr>
+          <a:xfrm>
+            <a:off x="548640" y="6355080"/>
+            <a:ext cx="11064240" cy="320040"/>
+          </a:xfrm>
+          <a:prstGeom prst="rect">
+            <a:avLst/>
+          </a:prstGeom>
+          <a:noFill/>
+        </p:spPr>
+        <p:txBody>
+          <a:bodyPr wrap="square">
+            <a:noAutofit/>
+          </a:bodyPr>
+          <a:lstStyle/>
+          <a:p>
+            <a:pPr algn="r">
+              <a:lnSpc>
+                <a:spcPts val="2200"/>
+              </a:lnSpc>
+              <a:defRPr sz="1000" b="0">
+                <a:solidFill>
+                  <a:srgbClr val="666666"/>
+                </a:solidFill>
+                <a:latin typeface="Calibri"/>
+              </a:defRPr>
+            </a:pPr>
+            <a:r>
+              <a:t>learn_uvm2017_sv_verilator / Module 4</a:t>
+            </a:r>
+          </a:p>
+        </p:txBody>
+      </p:sp>
+    </p:spTree>
+  </p:cSld>
+  <p:clrMapOvr>
+    <a:masterClrMapping/>
+  </p:clrMapOvr>
+</p:sld>
+</file>
+
+<file path=ppt/slides/slide81.xml><?xml version="1.0" encoding="utf-8"?>
+<p:sld xmlns:a="http://schemas.openxmlformats.org/drawingml/2006/main" xmlns:p="http://schemas.openxmlformats.org/presentationml/2006/main" xmlns:r="http://schemas.openxmlformats.org/officeDocument/2006/relationships">
+  <p:cSld>
+    <p:spTree>
+      <p:nvGrpSpPr>
+        <p:cNvPr id="1" name=""/>
+        <p:cNvGrpSpPr/>
+        <p:nvPr/>
+      </p:nvGrpSpPr>
+      <p:grpSpPr/>
+      <p:sp>
+        <p:nvSpPr>
+          <p:cNvPr id="2" name="TextBox 1"/>
+          <p:cNvSpPr txBox="1"/>
+          <p:nvPr/>
+        </p:nvSpPr>
+        <p:spPr>
+          <a:xfrm>
+            <a:off x="548640" y="411480"/>
+            <a:ext cx="11064240" cy="777240"/>
+          </a:xfrm>
+          <a:prstGeom prst="rect">
+            <a:avLst/>
+          </a:prstGeom>
+          <a:noFill/>
+        </p:spPr>
+        <p:txBody>
+          <a:bodyPr wrap="square">
+            <a:noAutofit/>
+          </a:bodyPr>
+          <a:lstStyle/>
+          <a:p>
+            <a:pPr>
+              <a:lnSpc>
+                <a:spcPts val="2200"/>
+              </a:lnSpc>
+              <a:defRPr sz="2800" b="1">
+                <a:solidFill>
+                  <a:srgbClr val="1A1A2E"/>
+                </a:solidFill>
+                <a:latin typeface="Calibri"/>
+              </a:defRPr>
+            </a:pPr>
+            <a:r>
+              <a:t>Exercises</a:t>
+            </a:r>
+          </a:p>
+        </p:txBody>
+      </p:sp>
+      <p:sp>
+        <p:nvSpPr>
+          <p:cNvPr id="3" name="TextBox 2"/>
+          <p:cNvSpPr txBox="1"/>
+          <p:nvPr/>
+        </p:nvSpPr>
+        <p:spPr>
+          <a:xfrm>
+            <a:off x="548640" y="1234440"/>
+            <a:ext cx="11064240" cy="4937760"/>
+          </a:xfrm>
+          <a:prstGeom prst="rect">
+            <a:avLst/>
+          </a:prstGeom>
+          <a:noFill/>
+        </p:spPr>
+        <p:txBody>
+          <a:bodyPr wrap="square">
+            <a:noAutofit/>
+          </a:bodyPr>
+          <a:lstStyle/>
+          <a:p>
+            <a:pPr>
+              <a:lnSpc>
+                <a:spcPts val="2200"/>
+              </a:lnSpc>
+              <a:spcAft>
+                <a:spcPts val="1000"/>
+              </a:spcAft>
+              <a:defRPr sz="2000" b="0">
+                <a:solidFill>
+                  <a:srgbClr val="333333"/>
+                </a:solidFill>
+                <a:latin typeface="Calibri"/>
+              </a:defRPr>
+            </a:pPr>
+            <a:r>
+              <a:t>• Transaction Modeling</a:t>
+            </a:r>
+          </a:p>
+          <a:p>
+            <a:pPr>
+              <a:lnSpc>
+                <a:spcPts val="2200"/>
+              </a:lnSpc>
+              <a:spcAft>
+                <a:spcPts val="1000"/>
+              </a:spcAft>
+              <a:defRPr sz="2000" b="0">
+                <a:solidFill>
+                  <a:srgbClr val="333333"/>
+                </a:solidFill>
+                <a:latin typeface="Calibri"/>
+              </a:defRPr>
+            </a:pPr>
+            <a:r>
+              <a:t>• Driver Implementation</a:t>
+            </a:r>
+          </a:p>
+          <a:p>
+            <a:pPr>
+              <a:lnSpc>
+                <a:spcPts val="2200"/>
+              </a:lnSpc>
+              <a:spcAft>
+                <a:spcPts val="1000"/>
+              </a:spcAft>
+              <a:defRPr sz="2000" b="0">
+                <a:solidFill>
+                  <a:srgbClr val="333333"/>
+                </a:solidFill>
+                <a:latin typeface="Calibri"/>
+              </a:defRPr>
+            </a:pPr>
+            <a:r>
+              <a:t>• Monitor Implementation</a:t>
+            </a:r>
+          </a:p>
+          <a:p>
+            <a:pPr>
+              <a:lnSpc>
+                <a:spcPts val="2200"/>
+              </a:lnSpc>
+              <a:spcAft>
+                <a:spcPts val="1000"/>
+              </a:spcAft>
+              <a:defRPr sz="2000" b="0">
+                <a:solidFill>
+                  <a:srgbClr val="333333"/>
+                </a:solidFill>
+                <a:latin typeface="Calibri"/>
+              </a:defRPr>
+            </a:pPr>
+            <a:r>
+              <a:t>• Sequencer and Sequences</a:t>
+            </a:r>
+          </a:p>
+          <a:p>
+            <a:pPr>
+              <a:lnSpc>
+                <a:spcPts val="2200"/>
+              </a:lnSpc>
+              <a:spcAft>
+                <a:spcPts val="1000"/>
+              </a:spcAft>
+              <a:defRPr sz="2000" b="0">
+                <a:solidFill>
+                  <a:srgbClr val="333333"/>
+                </a:solidFill>
+                <a:latin typeface="Calibri"/>
+              </a:defRPr>
+            </a:pPr>
+            <a:r>
+              <a:t>• TLM Communication</a:t>
+            </a:r>
+          </a:p>
+        </p:txBody>
+      </p:sp>
+      <p:sp>
+        <p:nvSpPr>
+          <p:cNvPr id="4" name="TextBox 3"/>
+          <p:cNvSpPr txBox="1"/>
+          <p:nvPr/>
+        </p:nvSpPr>
+        <p:spPr>
+          <a:xfrm>
+            <a:off x="548640" y="6355080"/>
+            <a:ext cx="11064240" cy="320040"/>
+          </a:xfrm>
+          <a:prstGeom prst="rect">
+            <a:avLst/>
+          </a:prstGeom>
+          <a:noFill/>
+        </p:spPr>
+        <p:txBody>
+          <a:bodyPr wrap="square">
+            <a:noAutofit/>
+          </a:bodyPr>
+          <a:lstStyle/>
+          <a:p>
+            <a:pPr algn="r">
+              <a:lnSpc>
+                <a:spcPts val="2200"/>
+              </a:lnSpc>
+              <a:defRPr sz="1000" b="0">
+                <a:solidFill>
+                  <a:srgbClr val="666666"/>
+                </a:solidFill>
+                <a:latin typeface="Calibri"/>
+              </a:defRPr>
+            </a:pPr>
+            <a:r>
+              <a:t>learn_uvm2017_sv_verilator / Module 4</a:t>
+            </a:r>
+          </a:p>
+        </p:txBody>
+      </p:sp>
+    </p:spTree>
+  </p:cSld>
+  <p:clrMapOvr>
+    <a:masterClrMapping/>
+  </p:clrMapOvr>
+</p:sld>
+</file>
+
+<file path=ppt/slides/slide82.xml><?xml version="1.0" encoding="utf-8"?>
+<p:sld xmlns:a="http://schemas.openxmlformats.org/drawingml/2006/main" xmlns:p="http://schemas.openxmlformats.org/presentationml/2006/main" xmlns:r="http://schemas.openxmlformats.org/officeDocument/2006/relationships">
+  <p:cSld>
+    <p:spTree>
+      <p:nvGrpSpPr>
+        <p:cNvPr id="1" name=""/>
+        <p:cNvGrpSpPr/>
+        <p:nvPr/>
+      </p:nvGrpSpPr>
+      <p:grpSpPr/>
+      <p:sp>
+        <p:nvSpPr>
+          <p:cNvPr id="2" name="TextBox 1"/>
+          <p:cNvSpPr txBox="1"/>
+          <p:nvPr/>
+        </p:nvSpPr>
+        <p:spPr>
+          <a:xfrm>
+            <a:off x="548640" y="411480"/>
+            <a:ext cx="11064240" cy="777240"/>
+          </a:xfrm>
+          <a:prstGeom prst="rect">
+            <a:avLst/>
+          </a:prstGeom>
+          <a:noFill/>
+        </p:spPr>
+        <p:txBody>
+          <a:bodyPr wrap="square">
+            <a:noAutofit/>
+          </a:bodyPr>
+          <a:lstStyle/>
+          <a:p>
+            <a:pPr>
+              <a:lnSpc>
+                <a:spcPts val="2200"/>
+              </a:lnSpc>
+              <a:defRPr sz="2800" b="1">
+                <a:solidFill>
+                  <a:srgbClr val="1A1A2E"/>
+                </a:solidFill>
+                <a:latin typeface="Calibri"/>
+              </a:defRPr>
+            </a:pPr>
+            <a:r>
+              <a:t>Exercises</a:t>
+            </a:r>
+          </a:p>
+        </p:txBody>
+      </p:sp>
+      <p:sp>
+        <p:nvSpPr>
+          <p:cNvPr id="3" name="TextBox 2"/>
+          <p:cNvSpPr txBox="1"/>
+          <p:nvPr/>
+        </p:nvSpPr>
+        <p:spPr>
+          <a:xfrm>
+            <a:off x="548640" y="1234440"/>
+            <a:ext cx="11064240" cy="4937760"/>
+          </a:xfrm>
+          <a:prstGeom prst="rect">
+            <a:avLst/>
+          </a:prstGeom>
+          <a:noFill/>
+        </p:spPr>
+        <p:txBody>
+          <a:bodyPr wrap="square">
+            <a:noAutofit/>
+          </a:bodyPr>
+          <a:lstStyle/>
+          <a:p>
+            <a:pPr>
+              <a:lnSpc>
+                <a:spcPts val="2200"/>
+              </a:lnSpc>
+              <a:spcAft>
+                <a:spcPts val="1000"/>
+              </a:spcAft>
+              <a:defRPr sz="2000" b="0">
+                <a:solidFill>
+                  <a:srgbClr val="333333"/>
+                </a:solidFill>
+                <a:latin typeface="Calibri"/>
+              </a:defRPr>
+            </a:pPr>
+            <a:r>
+              <a:t>• Scoreboards</a:t>
+            </a:r>
+          </a:p>
+          <a:p>
+            <a:pPr>
+              <a:lnSpc>
+                <a:spcPts val="2200"/>
+              </a:lnSpc>
+              <a:spcAft>
+                <a:spcPts val="1000"/>
+              </a:spcAft>
+              <a:defRPr sz="2000" b="0">
+                <a:solidFill>
+                  <a:srgbClr val="333333"/>
+                </a:solidFill>
+                <a:latin typeface="Calibri"/>
+              </a:defRPr>
+            </a:pPr>
+            <a:r>
+              <a:t>• Complete Agents</a:t>
+            </a:r>
+          </a:p>
+        </p:txBody>
+      </p:sp>
+      <p:sp>
+        <p:nvSpPr>
+          <p:cNvPr id="4" name="TextBox 3"/>
+          <p:cNvSpPr txBox="1"/>
+          <p:nvPr/>
+        </p:nvSpPr>
+        <p:spPr>
+          <a:xfrm>
+            <a:off x="548640" y="6355080"/>
+            <a:ext cx="11064240" cy="320040"/>
+          </a:xfrm>
+          <a:prstGeom prst="rect">
+            <a:avLst/>
+          </a:prstGeom>
+          <a:noFill/>
+        </p:spPr>
+        <p:txBody>
+          <a:bodyPr wrap="square">
+            <a:noAutofit/>
+          </a:bodyPr>
+          <a:lstStyle/>
+          <a:p>
+            <a:pPr algn="r">
+              <a:lnSpc>
+                <a:spcPts val="2200"/>
+              </a:lnSpc>
+              <a:defRPr sz="1000" b="0">
+                <a:solidFill>
+                  <a:srgbClr val="666666"/>
+                </a:solidFill>
+                <a:latin typeface="Calibri"/>
+              </a:defRPr>
+            </a:pPr>
+            <a:r>
+              <a:t>learn_uvm2017_sv_verilator / Module 4</a:t>
+            </a:r>
+          </a:p>
+        </p:txBody>
+      </p:sp>
+    </p:spTree>
+  </p:cSld>
+  <p:clrMapOvr>
+    <a:masterClrMapping/>
+  </p:clrMapOvr>
+</p:sld>
+</file>
+
+<file path=ppt/slides/slide83.xml><?xml version="1.0" encoding="utf-8"?>
+<p:sld xmlns:a="http://schemas.openxmlformats.org/drawingml/2006/main" xmlns:p="http://schemas.openxmlformats.org/presentationml/2006/main" xmlns:r="http://schemas.openxmlformats.org/officeDocument/2006/relationships">
+  <p:cSld>
+    <p:spTree>
+      <p:nvGrpSpPr>
+        <p:cNvPr id="1" name=""/>
+        <p:cNvGrpSpPr/>
+        <p:nvPr/>
+      </p:nvGrpSpPr>
+      <p:grpSpPr/>
+      <p:sp>
+        <p:nvSpPr>
+          <p:cNvPr id="2" name="TextBox 1"/>
+          <p:cNvSpPr txBox="1"/>
+          <p:nvPr/>
+        </p:nvSpPr>
+        <p:spPr>
+          <a:xfrm>
+            <a:off x="548640" y="411480"/>
+            <a:ext cx="11064240" cy="777240"/>
+          </a:xfrm>
+          <a:prstGeom prst="rect">
+            <a:avLst/>
+          </a:prstGeom>
+          <a:noFill/>
+        </p:spPr>
+        <p:txBody>
+          <a:bodyPr wrap="square">
+            <a:noAutofit/>
+          </a:bodyPr>
+          <a:lstStyle/>
+          <a:p>
+            <a:pPr>
+              <a:lnSpc>
+                <a:spcPts val="2200"/>
+              </a:lnSpc>
+              <a:defRPr sz="2800" b="1">
+                <a:solidFill>
+                  <a:srgbClr val="1A1A2E"/>
+                </a:solidFill>
+                <a:latin typeface="Calibri"/>
+              </a:defRPr>
+            </a:pPr>
+            <a:r>
+              <a:t>Assessment checklist</a:t>
+            </a:r>
+          </a:p>
+        </p:txBody>
+      </p:sp>
+      <p:sp>
+        <p:nvSpPr>
+          <p:cNvPr id="3" name="TextBox 2"/>
+          <p:cNvSpPr txBox="1"/>
+          <p:nvPr/>
+        </p:nvSpPr>
+        <p:spPr>
+          <a:xfrm>
+            <a:off x="548640" y="1234440"/>
+            <a:ext cx="11064240" cy="4937760"/>
+          </a:xfrm>
+          <a:prstGeom prst="rect">
+            <a:avLst/>
+          </a:prstGeom>
+          <a:noFill/>
+        </p:spPr>
+        <p:txBody>
+          <a:bodyPr wrap="square">
+            <a:noAutofit/>
+          </a:bodyPr>
+          <a:lstStyle/>
+          <a:p>
+            <a:pPr>
+              <a:lnSpc>
+                <a:spcPts val="2200"/>
+              </a:lnSpc>
+              <a:spcAft>
+                <a:spcPts val="1000"/>
+              </a:spcAft>
+              <a:defRPr sz="2000" b="0">
+                <a:solidFill>
+                  <a:srgbClr val="333333"/>
+                </a:solidFill>
+                <a:latin typeface="Calibri"/>
+              </a:defRPr>
+            </a:pPr>
+            <a:r>
+              <a:t>• Can design and implement transaction classes</a:t>
+            </a:r>
+          </a:p>
+          <a:p>
+            <a:pPr>
+              <a:lnSpc>
+                <a:spcPts val="2200"/>
+              </a:lnSpc>
+              <a:spcAft>
+                <a:spcPts val="1000"/>
+              </a:spcAft>
+              <a:defRPr sz="2000" b="0">
+                <a:solidFill>
+                  <a:srgbClr val="333333"/>
+                </a:solidFill>
+                <a:latin typeface="Calibri"/>
+              </a:defRPr>
+            </a:pPr>
+            <a:r>
+              <a:t>• Can create drivers for DUT stimulus</a:t>
+            </a:r>
+          </a:p>
+          <a:p>
+            <a:pPr>
+              <a:lnSpc>
+                <a:spcPts val="2200"/>
+              </a:lnSpc>
+              <a:spcAft>
+                <a:spcPts val="1000"/>
+              </a:spcAft>
+              <a:defRPr sz="2000" b="0">
+                <a:solidFill>
+                  <a:srgbClr val="333333"/>
+                </a:solidFill>
+                <a:latin typeface="Calibri"/>
+              </a:defRPr>
+            </a:pPr>
+            <a:r>
+              <a:t>• Can implement monitors for DUT observation</a:t>
+            </a:r>
+          </a:p>
+          <a:p>
+            <a:pPr>
+              <a:lnSpc>
+                <a:spcPts val="2200"/>
+              </a:lnSpc>
+              <a:spcAft>
+                <a:spcPts val="1000"/>
+              </a:spcAft>
+              <a:defRPr sz="2000" b="0">
+                <a:solidFill>
+                  <a:srgbClr val="333333"/>
+                </a:solidFill>
+                <a:latin typeface="Calibri"/>
+              </a:defRPr>
+            </a:pPr>
+            <a:r>
+              <a:t>• Can build sequencers and sequences</a:t>
+            </a:r>
+          </a:p>
+          <a:p>
+            <a:pPr>
+              <a:lnSpc>
+                <a:spcPts val="2200"/>
+              </a:lnSpc>
+              <a:spcAft>
+                <a:spcPts val="1000"/>
+              </a:spcAft>
+              <a:defRPr sz="2000" b="0">
+                <a:solidFill>
+                  <a:srgbClr val="333333"/>
+                </a:solidFill>
+                <a:latin typeface="Calibri"/>
+              </a:defRPr>
+            </a:pPr>
+            <a:r>
+              <a:t>• Can use TLM for component communication</a:t>
+            </a:r>
+          </a:p>
+          <a:p>
+            <a:pPr>
+              <a:lnSpc>
+                <a:spcPts val="2200"/>
+              </a:lnSpc>
+              <a:spcAft>
+                <a:spcPts val="1000"/>
+              </a:spcAft>
+              <a:defRPr sz="2000" b="0">
+                <a:solidFill>
+                  <a:srgbClr val="333333"/>
+                </a:solidFill>
+                <a:latin typeface="Calibri"/>
+              </a:defRPr>
+            </a:pPr>
+            <a:r>
+              <a:t>• Can create scoreboards for result checking</a:t>
+            </a:r>
+          </a:p>
+        </p:txBody>
+      </p:sp>
+      <p:sp>
+        <p:nvSpPr>
+          <p:cNvPr id="4" name="TextBox 3"/>
+          <p:cNvSpPr txBox="1"/>
+          <p:nvPr/>
+        </p:nvSpPr>
+        <p:spPr>
+          <a:xfrm>
+            <a:off x="548640" y="6355080"/>
+            <a:ext cx="11064240" cy="320040"/>
+          </a:xfrm>
+          <a:prstGeom prst="rect">
+            <a:avLst/>
+          </a:prstGeom>
+          <a:noFill/>
+        </p:spPr>
+        <p:txBody>
+          <a:bodyPr wrap="square">
+            <a:noAutofit/>
+          </a:bodyPr>
+          <a:lstStyle/>
+          <a:p>
+            <a:pPr algn="r">
+              <a:lnSpc>
+                <a:spcPts val="2200"/>
+              </a:lnSpc>
+              <a:defRPr sz="1000" b="0">
+                <a:solidFill>
+                  <a:srgbClr val="666666"/>
+                </a:solidFill>
+                <a:latin typeface="Calibri"/>
+              </a:defRPr>
+            </a:pPr>
+            <a:r>
+              <a:t>learn_uvm2017_sv_verilator / Module 4</a:t>
+            </a:r>
+          </a:p>
+        </p:txBody>
+      </p:sp>
+    </p:spTree>
+  </p:cSld>
+  <p:clrMapOvr>
+    <a:masterClrMapping/>
+  </p:clrMapOvr>
+</p:sld>
+</file>
+
+<file path=ppt/slides/slide84.xml><?xml version="1.0" encoding="utf-8"?>
+<p:sld xmlns:a="http://schemas.openxmlformats.org/drawingml/2006/main" xmlns:p="http://schemas.openxmlformats.org/presentationml/2006/main" xmlns:r="http://schemas.openxmlformats.org/officeDocument/2006/relationships">
+  <p:cSld>
+    <p:spTree>
+      <p:nvGrpSpPr>
+        <p:cNvPr id="1" name=""/>
+        <p:cNvGrpSpPr/>
+        <p:nvPr/>
+      </p:nvGrpSpPr>
+      <p:grpSpPr/>
+      <p:sp>
+        <p:nvSpPr>
+          <p:cNvPr id="2" name="TextBox 1"/>
+          <p:cNvSpPr txBox="1"/>
+          <p:nvPr/>
+        </p:nvSpPr>
+        <p:spPr>
+          <a:xfrm>
+            <a:off x="548640" y="411480"/>
+            <a:ext cx="11064240" cy="777240"/>
+          </a:xfrm>
+          <a:prstGeom prst="rect">
+            <a:avLst/>
+          </a:prstGeom>
+          <a:noFill/>
+        </p:spPr>
+        <p:txBody>
+          <a:bodyPr wrap="square">
+            <a:noAutofit/>
+          </a:bodyPr>
+          <a:lstStyle/>
+          <a:p>
+            <a:pPr>
+              <a:lnSpc>
+                <a:spcPts val="2200"/>
+              </a:lnSpc>
+              <a:defRPr sz="2800" b="1">
+                <a:solidFill>
+                  <a:srgbClr val="1A1A2E"/>
+                </a:solidFill>
+                <a:latin typeface="Calibri"/>
+              </a:defRPr>
+            </a:pPr>
+            <a:r>
+              <a:t>Summary &amp; next steps</a:t>
+            </a:r>
+          </a:p>
+        </p:txBody>
+      </p:sp>
+      <p:sp>
+        <p:nvSpPr>
+          <p:cNvPr id="3" name="TextBox 2"/>
+          <p:cNvSpPr txBox="1"/>
+          <p:nvPr/>
+        </p:nvSpPr>
+        <p:spPr>
+          <a:xfrm>
+            <a:off x="548640" y="1234440"/>
+            <a:ext cx="11064240" cy="4937760"/>
+          </a:xfrm>
+          <a:prstGeom prst="rect">
+            <a:avLst/>
+          </a:prstGeom>
+          <a:noFill/>
+        </p:spPr>
+        <p:txBody>
+          <a:bodyPr wrap="square">
+            <a:noAutofit/>
+          </a:bodyPr>
+          <a:lstStyle/>
+          <a:p>
+            <a:pPr>
+              <a:lnSpc>
+                <a:spcPts val="2200"/>
+              </a:lnSpc>
+              <a:spcAft>
+                <a:spcPts val="1000"/>
+              </a:spcAft>
+              <a:defRPr sz="2000" b="0">
+                <a:solidFill>
+                  <a:srgbClr val="333333"/>
+                </a:solidFill>
+                <a:latin typeface="Calibri"/>
+              </a:defRPr>
+            </a:pPr>
+            <a:r>
+              <a:t>• Build complete UVM agents with driver, monitor, and</a:t>
+            </a:r>
+          </a:p>
+          <a:p>
+            <a:pPr>
+              <a:lnSpc>
+                <a:spcPts val="2200"/>
+              </a:lnSpc>
+              <a:spcAft>
+                <a:spcPts val="1000"/>
+              </a:spcAft>
+              <a:defRPr sz="2000" b="0">
+                <a:solidFill>
+                  <a:srgbClr val="333333"/>
+                </a:solidFill>
+                <a:latin typeface="Calibri"/>
+              </a:defRPr>
+            </a:pPr>
+            <a:r>
+              <a:t>      sequencer</a:t>
+            </a:r>
+          </a:p>
+          <a:p>
+            <a:pPr>
+              <a:lnSpc>
+                <a:spcPts val="2200"/>
+              </a:lnSpc>
+              <a:spcAft>
+                <a:spcPts val="1000"/>
+              </a:spcAft>
+              <a:defRPr sz="2000" b="0">
+                <a:solidFill>
+                  <a:srgbClr val="333333"/>
+                </a:solidFill>
+                <a:latin typeface="Calibri"/>
+              </a:defRPr>
+            </a:pPr>
+            <a:r>
+              <a:t>• Complete module4/CHECKLIST.md</a:t>
+            </a:r>
+          </a:p>
+          <a:p>
+            <a:pPr>
+              <a:lnSpc>
+                <a:spcPts val="2200"/>
+              </a:lnSpc>
+              <a:spcAft>
+                <a:spcPts val="1000"/>
+              </a:spcAft>
+              <a:defRPr sz="2000" b="0">
+                <a:solidFill>
+                  <a:srgbClr val="333333"/>
+                </a:solidFill>
+                <a:latin typeface="Calibri"/>
+              </a:defRPr>
+            </a:pPr>
+            <a:r>
+              <a:t>• Review module4/EXAMPLES.md and run each lab</a:t>
+            </a:r>
+          </a:p>
+          <a:p>
+            <a:pPr>
+              <a:lnSpc>
+                <a:spcPts val="2200"/>
+              </a:lnSpc>
+              <a:spcAft>
+                <a:spcPts val="1000"/>
+              </a:spcAft>
+              <a:defRPr sz="2000" b="0">
+                <a:solidFill>
+                  <a:srgbClr val="333333"/>
+                </a:solidFill>
+                <a:latin typeface="Calibri"/>
+              </a:defRPr>
+            </a:pPr>
+            <a:r>
+              <a:t>• Next: Next module in course</a:t>
             </a:r>
           </a:p>
         </p:txBody>
